--- a/docs/pptx/carbo/ritu-carbo-linsubhr-ratio-hosp-immune-other_10pct.pptx
+++ b/docs/pptx/carbo/ritu-carbo-linsubhr-ratio-hosp-immune-other_10pct.pptx
@@ -2443,7 +2443,7 @@
           </p:nvSpPr>
           <p:spPr>
             <a:xfrm>
-              <a:off x="973953" y="2073503"/>
+              <a:off x="974732" y="2073503"/>
               <a:ext cx="0" cy="3649639"/>
             </a:xfrm>
             <a:custGeom>
@@ -2486,7 +2486,7 @@
           </p:nvSpPr>
           <p:spPr>
             <a:xfrm>
-              <a:off x="1881787" y="2073503"/>
+              <a:off x="1882345" y="2073503"/>
               <a:ext cx="0" cy="3649639"/>
             </a:xfrm>
             <a:custGeom>
@@ -2529,7 +2529,7 @@
           </p:nvSpPr>
           <p:spPr>
             <a:xfrm>
-              <a:off x="2789620" y="2073503"/>
+              <a:off x="2789957" y="2073503"/>
               <a:ext cx="0" cy="3649639"/>
             </a:xfrm>
             <a:custGeom>
@@ -2572,7 +2572,7 @@
           </p:nvSpPr>
           <p:spPr>
             <a:xfrm>
-              <a:off x="3697454" y="2073503"/>
+              <a:off x="3697570" y="2073503"/>
               <a:ext cx="0" cy="3649639"/>
             </a:xfrm>
             <a:custGeom>
@@ -2615,7 +2615,7 @@
           </p:nvSpPr>
           <p:spPr>
             <a:xfrm>
-              <a:off x="4605287" y="2073503"/>
+              <a:off x="4605182" y="2073503"/>
               <a:ext cx="0" cy="3649639"/>
             </a:xfrm>
             <a:custGeom>
@@ -2658,7 +2658,7 @@
           </p:nvSpPr>
           <p:spPr>
             <a:xfrm>
-              <a:off x="5513120" y="2073503"/>
+              <a:off x="5512795" y="2073503"/>
               <a:ext cx="0" cy="3649639"/>
             </a:xfrm>
             <a:custGeom>
@@ -2701,7 +2701,7 @@
           </p:nvSpPr>
           <p:spPr>
             <a:xfrm>
-              <a:off x="6420954" y="2073503"/>
+              <a:off x="6420407" y="2073503"/>
               <a:ext cx="0" cy="3649639"/>
             </a:xfrm>
             <a:custGeom>
@@ -2744,7 +2744,7 @@
           </p:nvSpPr>
           <p:spPr>
             <a:xfrm>
-              <a:off x="7328787" y="2073503"/>
+              <a:off x="7328020" y="2073503"/>
               <a:ext cx="0" cy="3649639"/>
             </a:xfrm>
             <a:custGeom>
@@ -2787,7 +2787,7 @@
           </p:nvSpPr>
           <p:spPr>
             <a:xfrm>
-              <a:off x="8236620" y="2073503"/>
+              <a:off x="8235632" y="2073503"/>
               <a:ext cx="0" cy="3649639"/>
             </a:xfrm>
             <a:custGeom>
@@ -3045,7 +3045,7 @@
           </p:nvSpPr>
           <p:spPr>
             <a:xfrm>
-              <a:off x="1427870" y="2073503"/>
+              <a:off x="1428538" y="2073503"/>
               <a:ext cx="0" cy="3649639"/>
             </a:xfrm>
             <a:custGeom>
@@ -3088,7 +3088,7 @@
           </p:nvSpPr>
           <p:spPr>
             <a:xfrm>
-              <a:off x="2335703" y="2073503"/>
+              <a:off x="2336151" y="2073503"/>
               <a:ext cx="0" cy="3649639"/>
             </a:xfrm>
             <a:custGeom>
@@ -3131,7 +3131,7 @@
           </p:nvSpPr>
           <p:spPr>
             <a:xfrm>
-              <a:off x="3243537" y="2073503"/>
+              <a:off x="3243764" y="2073503"/>
               <a:ext cx="0" cy="3649639"/>
             </a:xfrm>
             <a:custGeom>
@@ -3174,7 +3174,7 @@
           </p:nvSpPr>
           <p:spPr>
             <a:xfrm>
-              <a:off x="4151370" y="2073503"/>
+              <a:off x="4151376" y="2073503"/>
               <a:ext cx="0" cy="3649639"/>
             </a:xfrm>
             <a:custGeom>
@@ -3217,7 +3217,7 @@
           </p:nvSpPr>
           <p:spPr>
             <a:xfrm>
-              <a:off x="5059204" y="2073503"/>
+              <a:off x="5058989" y="2073503"/>
               <a:ext cx="0" cy="3649639"/>
             </a:xfrm>
             <a:custGeom>
@@ -3260,7 +3260,7 @@
           </p:nvSpPr>
           <p:spPr>
             <a:xfrm>
-              <a:off x="5967037" y="2073503"/>
+              <a:off x="5966601" y="2073503"/>
               <a:ext cx="0" cy="3649639"/>
             </a:xfrm>
             <a:custGeom>
@@ -3303,7 +3303,7 @@
           </p:nvSpPr>
           <p:spPr>
             <a:xfrm>
-              <a:off x="6874870" y="2073503"/>
+              <a:off x="6874214" y="2073503"/>
               <a:ext cx="0" cy="3649639"/>
             </a:xfrm>
             <a:custGeom>
@@ -3346,7 +3346,7 @@
           </p:nvSpPr>
           <p:spPr>
             <a:xfrm>
-              <a:off x="7782704" y="2073503"/>
+              <a:off x="7781826" y="2073503"/>
               <a:ext cx="0" cy="3649639"/>
             </a:xfrm>
             <a:custGeom>
@@ -3390,515 +3390,515 @@
           <p:spPr>
             <a:xfrm>
               <a:off x="1172049" y="2073503"/>
-              <a:ext cx="7090630" cy="3483304"/>
+              <a:ext cx="7090630" cy="3483276"/>
             </a:xfrm>
             <a:custGeom>
               <a:avLst/>
               <a:pathLst>
-                <a:path w="7090630" h="3483304">
+                <a:path w="7090630" h="3483276">
                   <a:moveTo>
-                    <a:pt x="2320091" y="0"/>
+                    <a:pt x="2342710" y="0"/>
                   </a:moveTo>
                   <a:lnTo>
-                    <a:pt x="2363543" y="280126"/>
-                  </a:lnTo>
-                  <a:lnTo>
-                    <a:pt x="2435165" y="683700"/>
-                  </a:lnTo>
-                  <a:lnTo>
-                    <a:pt x="2506788" y="1036434"/>
-                  </a:lnTo>
-                  <a:lnTo>
-                    <a:pt x="2578410" y="1344733"/>
-                  </a:lnTo>
-                  <a:lnTo>
-                    <a:pt x="2650033" y="1614194"/>
-                  </a:lnTo>
-                  <a:lnTo>
-                    <a:pt x="2721655" y="1849709"/>
-                  </a:lnTo>
-                  <a:lnTo>
-                    <a:pt x="2793278" y="2055556"/>
-                  </a:lnTo>
-                  <a:lnTo>
-                    <a:pt x="2864901" y="2235472"/>
-                  </a:lnTo>
-                  <a:lnTo>
-                    <a:pt x="2936523" y="2392722"/>
-                  </a:lnTo>
-                  <a:lnTo>
-                    <a:pt x="3008146" y="2530163"/>
-                  </a:lnTo>
-                  <a:lnTo>
-                    <a:pt x="3079768" y="2650290"/>
-                  </a:lnTo>
-                  <a:lnTo>
-                    <a:pt x="3151391" y="2648517"/>
-                  </a:lnTo>
-                  <a:lnTo>
-                    <a:pt x="3223013" y="2642496"/>
-                  </a:lnTo>
-                  <a:lnTo>
-                    <a:pt x="3294636" y="2636432"/>
-                  </a:lnTo>
-                  <a:lnTo>
-                    <a:pt x="3366258" y="2630324"/>
-                  </a:lnTo>
-                  <a:lnTo>
-                    <a:pt x="3437881" y="2624172"/>
-                  </a:lnTo>
-                  <a:lnTo>
-                    <a:pt x="3509503" y="2617975"/>
-                  </a:lnTo>
-                  <a:lnTo>
-                    <a:pt x="3581126" y="2611734"/>
-                  </a:lnTo>
-                  <a:lnTo>
-                    <a:pt x="3652748" y="2605448"/>
-                  </a:lnTo>
-                  <a:lnTo>
-                    <a:pt x="3724371" y="2599117"/>
-                  </a:lnTo>
-                  <a:lnTo>
-                    <a:pt x="3795993" y="2592739"/>
-                  </a:lnTo>
-                  <a:lnTo>
-                    <a:pt x="3867616" y="2586316"/>
-                  </a:lnTo>
-                  <a:lnTo>
-                    <a:pt x="3939238" y="2579847"/>
-                  </a:lnTo>
-                  <a:lnTo>
-                    <a:pt x="4010861" y="2573331"/>
-                  </a:lnTo>
-                  <a:lnTo>
-                    <a:pt x="4082483" y="2566768"/>
-                  </a:lnTo>
-                  <a:lnTo>
-                    <a:pt x="4154106" y="2560158"/>
-                  </a:lnTo>
-                  <a:lnTo>
-                    <a:pt x="4225729" y="2553500"/>
-                  </a:lnTo>
-                  <a:lnTo>
-                    <a:pt x="4297351" y="2546794"/>
-                  </a:lnTo>
-                  <a:lnTo>
-                    <a:pt x="4368974" y="2540040"/>
-                  </a:lnTo>
-                  <a:lnTo>
-                    <a:pt x="4440596" y="2533237"/>
-                  </a:lnTo>
-                  <a:lnTo>
-                    <a:pt x="4512219" y="2526385"/>
-                  </a:lnTo>
-                  <a:lnTo>
-                    <a:pt x="4583841" y="2519483"/>
-                  </a:lnTo>
-                  <a:lnTo>
-                    <a:pt x="4655464" y="2512532"/>
-                  </a:lnTo>
-                  <a:lnTo>
-                    <a:pt x="4727086" y="2505531"/>
-                  </a:lnTo>
-                  <a:lnTo>
-                    <a:pt x="4798709" y="2498479"/>
-                  </a:lnTo>
-                  <a:lnTo>
-                    <a:pt x="4870331" y="2491376"/>
-                  </a:lnTo>
-                  <a:lnTo>
-                    <a:pt x="4941954" y="2484223"/>
-                  </a:lnTo>
-                  <a:lnTo>
-                    <a:pt x="5013576" y="2477017"/>
-                  </a:lnTo>
-                  <a:lnTo>
-                    <a:pt x="5085199" y="2469760"/>
-                  </a:lnTo>
-                  <a:lnTo>
-                    <a:pt x="5156821" y="2462450"/>
-                  </a:lnTo>
-                  <a:lnTo>
-                    <a:pt x="5228444" y="2455088"/>
-                  </a:lnTo>
-                  <a:lnTo>
-                    <a:pt x="5300066" y="2447673"/>
-                  </a:lnTo>
-                  <a:lnTo>
-                    <a:pt x="5371689" y="2440204"/>
-                  </a:lnTo>
-                  <a:lnTo>
-                    <a:pt x="5443311" y="2432681"/>
-                  </a:lnTo>
-                  <a:lnTo>
-                    <a:pt x="5514934" y="2425104"/>
-                  </a:lnTo>
-                  <a:lnTo>
-                    <a:pt x="5586557" y="2417473"/>
-                  </a:lnTo>
-                  <a:lnTo>
-                    <a:pt x="5658179" y="2409786"/>
-                  </a:lnTo>
-                  <a:lnTo>
-                    <a:pt x="5729802" y="2402044"/>
-                  </a:lnTo>
-                  <a:lnTo>
-                    <a:pt x="5801424" y="2394247"/>
-                  </a:lnTo>
-                  <a:lnTo>
-                    <a:pt x="5873047" y="2386393"/>
-                  </a:lnTo>
-                  <a:lnTo>
-                    <a:pt x="5944669" y="2378482"/>
-                  </a:lnTo>
-                  <a:lnTo>
-                    <a:pt x="6016292" y="2370514"/>
-                  </a:lnTo>
-                  <a:lnTo>
-                    <a:pt x="6087914" y="2362489"/>
-                  </a:lnTo>
-                  <a:lnTo>
-                    <a:pt x="6159537" y="2354407"/>
-                  </a:lnTo>
-                  <a:lnTo>
-                    <a:pt x="6231159" y="2346265"/>
-                  </a:lnTo>
-                  <a:lnTo>
-                    <a:pt x="6302782" y="2338065"/>
-                  </a:lnTo>
-                  <a:lnTo>
-                    <a:pt x="6374404" y="2329807"/>
-                  </a:lnTo>
-                  <a:lnTo>
-                    <a:pt x="6446027" y="2321488"/>
-                  </a:lnTo>
-                  <a:lnTo>
-                    <a:pt x="6517649" y="2313110"/>
-                  </a:lnTo>
-                  <a:lnTo>
-                    <a:pt x="6589272" y="2304671"/>
-                  </a:lnTo>
-                  <a:lnTo>
-                    <a:pt x="6660894" y="2296171"/>
-                  </a:lnTo>
-                  <a:lnTo>
-                    <a:pt x="6732517" y="2287610"/>
-                  </a:lnTo>
-                  <a:lnTo>
-                    <a:pt x="6804139" y="2278987"/>
-                  </a:lnTo>
-                  <a:lnTo>
-                    <a:pt x="6875762" y="2270303"/>
-                  </a:lnTo>
-                  <a:lnTo>
-                    <a:pt x="6947385" y="2261555"/>
-                  </a:lnTo>
-                  <a:lnTo>
-                    <a:pt x="7019007" y="2252745"/>
-                  </a:lnTo>
-                  <a:lnTo>
-                    <a:pt x="7090630" y="2243871"/>
-                  </a:lnTo>
-                  <a:lnTo>
-                    <a:pt x="7090630" y="3483304"/>
-                  </a:lnTo>
-                  <a:lnTo>
-                    <a:pt x="7019007" y="3483240"/>
-                  </a:lnTo>
-                  <a:lnTo>
-                    <a:pt x="6947385" y="3483167"/>
-                  </a:lnTo>
-                  <a:lnTo>
-                    <a:pt x="6875762" y="3483083"/>
-                  </a:lnTo>
-                  <a:lnTo>
-                    <a:pt x="6804139" y="3482988"/>
-                  </a:lnTo>
-                  <a:lnTo>
-                    <a:pt x="6732517" y="3482878"/>
-                  </a:lnTo>
-                  <a:lnTo>
-                    <a:pt x="6660894" y="3482753"/>
-                  </a:lnTo>
-                  <a:lnTo>
-                    <a:pt x="6589272" y="3482610"/>
-                  </a:lnTo>
-                  <a:lnTo>
-                    <a:pt x="6517649" y="3482446"/>
-                  </a:lnTo>
-                  <a:lnTo>
-                    <a:pt x="6446027" y="3482259"/>
-                  </a:lnTo>
-                  <a:lnTo>
-                    <a:pt x="6374404" y="3482044"/>
-                  </a:lnTo>
-                  <a:lnTo>
-                    <a:pt x="6302782" y="3481799"/>
-                  </a:lnTo>
-                  <a:lnTo>
-                    <a:pt x="6231159" y="3481518"/>
-                  </a:lnTo>
-                  <a:lnTo>
-                    <a:pt x="6159537" y="3481197"/>
-                  </a:lnTo>
-                  <a:lnTo>
-                    <a:pt x="6087914" y="3480830"/>
-                  </a:lnTo>
-                  <a:lnTo>
-                    <a:pt x="6016292" y="3480409"/>
-                  </a:lnTo>
-                  <a:lnTo>
-                    <a:pt x="5944669" y="3479928"/>
-                  </a:lnTo>
-                  <a:lnTo>
-                    <a:pt x="5873047" y="3479378"/>
-                  </a:lnTo>
-                  <a:lnTo>
-                    <a:pt x="5801424" y="3478748"/>
-                  </a:lnTo>
-                  <a:lnTo>
-                    <a:pt x="5729802" y="3478028"/>
-                  </a:lnTo>
-                  <a:lnTo>
-                    <a:pt x="5658179" y="3477204"/>
-                  </a:lnTo>
-                  <a:lnTo>
-                    <a:pt x="5586557" y="3476261"/>
-                  </a:lnTo>
-                  <a:lnTo>
-                    <a:pt x="5514934" y="3475182"/>
-                  </a:lnTo>
-                  <a:lnTo>
-                    <a:pt x="5443311" y="3473947"/>
-                  </a:lnTo>
-                  <a:lnTo>
-                    <a:pt x="5371689" y="3472535"/>
-                  </a:lnTo>
-                  <a:lnTo>
-                    <a:pt x="5300066" y="3470919"/>
-                  </a:lnTo>
-                  <a:lnTo>
-                    <a:pt x="5228444" y="3469070"/>
-                  </a:lnTo>
-                  <a:lnTo>
-                    <a:pt x="5156821" y="3466955"/>
-                  </a:lnTo>
-                  <a:lnTo>
-                    <a:pt x="5085199" y="3464535"/>
-                  </a:lnTo>
-                  <a:lnTo>
-                    <a:pt x="5013576" y="3461766"/>
-                  </a:lnTo>
-                  <a:lnTo>
-                    <a:pt x="4941954" y="3458598"/>
-                  </a:lnTo>
-                  <a:lnTo>
-                    <a:pt x="4870331" y="3454973"/>
-                  </a:lnTo>
-                  <a:lnTo>
-                    <a:pt x="4798709" y="3450826"/>
-                  </a:lnTo>
-                  <a:lnTo>
-                    <a:pt x="4727086" y="3446081"/>
-                  </a:lnTo>
-                  <a:lnTo>
-                    <a:pt x="4655464" y="3440653"/>
-                  </a:lnTo>
-                  <a:lnTo>
-                    <a:pt x="4583841" y="3434442"/>
-                  </a:lnTo>
-                  <a:lnTo>
-                    <a:pt x="4512219" y="3427335"/>
-                  </a:lnTo>
-                  <a:lnTo>
-                    <a:pt x="4440596" y="3419205"/>
-                  </a:lnTo>
-                  <a:lnTo>
-                    <a:pt x="4368974" y="3409902"/>
-                  </a:lnTo>
-                  <a:lnTo>
-                    <a:pt x="4297351" y="3399259"/>
-                  </a:lnTo>
-                  <a:lnTo>
-                    <a:pt x="4225729" y="3387081"/>
-                  </a:lnTo>
-                  <a:lnTo>
-                    <a:pt x="4154106" y="3373149"/>
-                  </a:lnTo>
-                  <a:lnTo>
-                    <a:pt x="4082483" y="3357208"/>
-                  </a:lnTo>
-                  <a:lnTo>
-                    <a:pt x="4010861" y="3338970"/>
-                  </a:lnTo>
-                  <a:lnTo>
-                    <a:pt x="3939238" y="3318104"/>
-                  </a:lnTo>
-                  <a:lnTo>
-                    <a:pt x="3867616" y="3294229"/>
-                  </a:lnTo>
-                  <a:lnTo>
-                    <a:pt x="3795993" y="3266914"/>
-                  </a:lnTo>
-                  <a:lnTo>
-                    <a:pt x="3724371" y="3235662"/>
-                  </a:lnTo>
-                  <a:lnTo>
-                    <a:pt x="3652748" y="3199905"/>
-                  </a:lnTo>
-                  <a:lnTo>
-                    <a:pt x="3581126" y="3158994"/>
-                  </a:lnTo>
-                  <a:lnTo>
-                    <a:pt x="3509503" y="3112188"/>
-                  </a:lnTo>
-                  <a:lnTo>
-                    <a:pt x="3437881" y="3058634"/>
-                  </a:lnTo>
-                  <a:lnTo>
-                    <a:pt x="3366258" y="2997362"/>
-                  </a:lnTo>
-                  <a:lnTo>
-                    <a:pt x="3294636" y="2927259"/>
-                  </a:lnTo>
-                  <a:lnTo>
-                    <a:pt x="3223013" y="2847052"/>
-                  </a:lnTo>
-                  <a:lnTo>
-                    <a:pt x="3151391" y="2755284"/>
-                  </a:lnTo>
-                  <a:lnTo>
-                    <a:pt x="3079768" y="2654495"/>
-                  </a:lnTo>
-                  <a:lnTo>
-                    <a:pt x="3008146" y="2660430"/>
-                  </a:lnTo>
-                  <a:lnTo>
-                    <a:pt x="2936523" y="2666323"/>
-                  </a:lnTo>
-                  <a:lnTo>
-                    <a:pt x="2864901" y="2672173"/>
-                  </a:lnTo>
-                  <a:lnTo>
-                    <a:pt x="2793278" y="2677982"/>
-                  </a:lnTo>
-                  <a:lnTo>
-                    <a:pt x="2721655" y="2683749"/>
-                  </a:lnTo>
-                  <a:lnTo>
-                    <a:pt x="2650033" y="2689475"/>
-                  </a:lnTo>
-                  <a:lnTo>
-                    <a:pt x="2578410" y="2695160"/>
-                  </a:lnTo>
-                  <a:lnTo>
-                    <a:pt x="2506788" y="2700804"/>
-                  </a:lnTo>
-                  <a:lnTo>
-                    <a:pt x="2435165" y="2706407"/>
-                  </a:lnTo>
-                  <a:lnTo>
-                    <a:pt x="2363543" y="2711971"/>
-                  </a:lnTo>
-                  <a:lnTo>
-                    <a:pt x="2291920" y="2717495"/>
-                  </a:lnTo>
-                  <a:lnTo>
-                    <a:pt x="2220298" y="2722979"/>
-                  </a:lnTo>
-                  <a:lnTo>
-                    <a:pt x="2148675" y="2728424"/>
-                  </a:lnTo>
-                  <a:lnTo>
-                    <a:pt x="2077053" y="2733830"/>
-                  </a:lnTo>
-                  <a:lnTo>
-                    <a:pt x="2005430" y="2739197"/>
-                  </a:lnTo>
-                  <a:lnTo>
-                    <a:pt x="1933808" y="2744526"/>
-                  </a:lnTo>
-                  <a:lnTo>
-                    <a:pt x="1862185" y="2749817"/>
-                  </a:lnTo>
-                  <a:lnTo>
-                    <a:pt x="1790563" y="2755069"/>
-                  </a:lnTo>
-                  <a:lnTo>
-                    <a:pt x="1718940" y="2760285"/>
-                  </a:lnTo>
-                  <a:lnTo>
-                    <a:pt x="1647318" y="2765463"/>
-                  </a:lnTo>
-                  <a:lnTo>
-                    <a:pt x="1575695" y="2770604"/>
-                  </a:lnTo>
-                  <a:lnTo>
-                    <a:pt x="1504073" y="2775708"/>
-                  </a:lnTo>
-                  <a:lnTo>
-                    <a:pt x="1432450" y="2780775"/>
-                  </a:lnTo>
-                  <a:lnTo>
-                    <a:pt x="1360827" y="2785807"/>
-                  </a:lnTo>
-                  <a:lnTo>
-                    <a:pt x="1289205" y="2790802"/>
-                  </a:lnTo>
-                  <a:lnTo>
-                    <a:pt x="1217582" y="2795761"/>
-                  </a:lnTo>
-                  <a:lnTo>
-                    <a:pt x="1145960" y="2800685"/>
-                  </a:lnTo>
-                  <a:lnTo>
-                    <a:pt x="1074337" y="2805574"/>
-                  </a:lnTo>
-                  <a:lnTo>
-                    <a:pt x="1002715" y="2810428"/>
-                  </a:lnTo>
-                  <a:lnTo>
-                    <a:pt x="931092" y="2815247"/>
-                  </a:lnTo>
-                  <a:lnTo>
-                    <a:pt x="859470" y="2820032"/>
-                  </a:lnTo>
-                  <a:lnTo>
-                    <a:pt x="787847" y="2824782"/>
-                  </a:lnTo>
-                  <a:lnTo>
-                    <a:pt x="716225" y="2829498"/>
-                  </a:lnTo>
-                  <a:lnTo>
-                    <a:pt x="644602" y="2834181"/>
-                  </a:lnTo>
-                  <a:lnTo>
-                    <a:pt x="572980" y="2838830"/>
-                  </a:lnTo>
-                  <a:lnTo>
-                    <a:pt x="501357" y="2843446"/>
-                  </a:lnTo>
-                  <a:lnTo>
-                    <a:pt x="429735" y="2848028"/>
-                  </a:lnTo>
-                  <a:lnTo>
-                    <a:pt x="358112" y="2852578"/>
-                  </a:lnTo>
-                  <a:lnTo>
-                    <a:pt x="286490" y="2857096"/>
-                  </a:lnTo>
-                  <a:lnTo>
-                    <a:pt x="214867" y="2861581"/>
-                  </a:lnTo>
-                  <a:lnTo>
-                    <a:pt x="143245" y="2866034"/>
-                  </a:lnTo>
-                  <a:lnTo>
-                    <a:pt x="71622" y="2870455"/>
-                  </a:lnTo>
-                  <a:lnTo>
-                    <a:pt x="0" y="2874844"/>
+                    <a:pt x="2363543" y="139870"/>
+                  </a:lnTo>
+                  <a:lnTo>
+                    <a:pt x="2435165" y="560288"/>
+                  </a:lnTo>
+                  <a:lnTo>
+                    <a:pt x="2506788" y="927847"/>
+                  </a:lnTo>
+                  <a:lnTo>
+                    <a:pt x="2578410" y="1249195"/>
+                  </a:lnTo>
+                  <a:lnTo>
+                    <a:pt x="2650033" y="1530140"/>
+                  </a:lnTo>
+                  <a:lnTo>
+                    <a:pt x="2721655" y="1775762"/>
+                  </a:lnTo>
+                  <a:lnTo>
+                    <a:pt x="2793278" y="1990503"/>
+                  </a:lnTo>
+                  <a:lnTo>
+                    <a:pt x="2864901" y="2178245"/>
+                  </a:lnTo>
+                  <a:lnTo>
+                    <a:pt x="2936523" y="2342383"/>
+                  </a:lnTo>
+                  <a:lnTo>
+                    <a:pt x="3008146" y="2485884"/>
+                  </a:lnTo>
+                  <a:lnTo>
+                    <a:pt x="3079768" y="2611343"/>
+                  </a:lnTo>
+                  <a:lnTo>
+                    <a:pt x="3151391" y="2650654"/>
+                  </a:lnTo>
+                  <a:lnTo>
+                    <a:pt x="3223013" y="2644810"/>
+                  </a:lnTo>
+                  <a:lnTo>
+                    <a:pt x="3294636" y="2638924"/>
+                  </a:lnTo>
+                  <a:lnTo>
+                    <a:pt x="3366258" y="2632997"/>
+                  </a:lnTo>
+                  <a:lnTo>
+                    <a:pt x="3437881" y="2627028"/>
+                  </a:lnTo>
+                  <a:lnTo>
+                    <a:pt x="3509503" y="2621018"/>
+                  </a:lnTo>
+                  <a:lnTo>
+                    <a:pt x="3581126" y="2614965"/>
+                  </a:lnTo>
+                  <a:lnTo>
+                    <a:pt x="3652748" y="2608870"/>
+                  </a:lnTo>
+                  <a:lnTo>
+                    <a:pt x="3724371" y="2602732"/>
+                  </a:lnTo>
+                  <a:lnTo>
+                    <a:pt x="3795993" y="2596551"/>
+                  </a:lnTo>
+                  <a:lnTo>
+                    <a:pt x="3867616" y="2590327"/>
+                  </a:lnTo>
+                  <a:lnTo>
+                    <a:pt x="3939238" y="2584059"/>
+                  </a:lnTo>
+                  <a:lnTo>
+                    <a:pt x="4010861" y="2577747"/>
+                  </a:lnTo>
+                  <a:lnTo>
+                    <a:pt x="4082483" y="2571391"/>
+                  </a:lnTo>
+                  <a:lnTo>
+                    <a:pt x="4154106" y="2564990"/>
+                  </a:lnTo>
+                  <a:lnTo>
+                    <a:pt x="4225729" y="2558545"/>
+                  </a:lnTo>
+                  <a:lnTo>
+                    <a:pt x="4297351" y="2552054"/>
+                  </a:lnTo>
+                  <a:lnTo>
+                    <a:pt x="4368974" y="2545517"/>
+                  </a:lnTo>
+                  <a:lnTo>
+                    <a:pt x="4440596" y="2538935"/>
+                  </a:lnTo>
+                  <a:lnTo>
+                    <a:pt x="4512219" y="2532306"/>
+                  </a:lnTo>
+                  <a:lnTo>
+                    <a:pt x="4583841" y="2525631"/>
+                  </a:lnTo>
+                  <a:lnTo>
+                    <a:pt x="4655464" y="2518909"/>
+                  </a:lnTo>
+                  <a:lnTo>
+                    <a:pt x="4727086" y="2512140"/>
+                  </a:lnTo>
+                  <a:lnTo>
+                    <a:pt x="4798709" y="2505324"/>
+                  </a:lnTo>
+                  <a:lnTo>
+                    <a:pt x="4870331" y="2498460"/>
+                  </a:lnTo>
+                  <a:lnTo>
+                    <a:pt x="4941954" y="2491547"/>
+                  </a:lnTo>
+                  <a:lnTo>
+                    <a:pt x="5013576" y="2484586"/>
+                  </a:lnTo>
+                  <a:lnTo>
+                    <a:pt x="5085199" y="2477576"/>
+                  </a:lnTo>
+                  <a:lnTo>
+                    <a:pt x="5156821" y="2470518"/>
+                  </a:lnTo>
+                  <a:lnTo>
+                    <a:pt x="5228444" y="2463409"/>
+                  </a:lnTo>
+                  <a:lnTo>
+                    <a:pt x="5300066" y="2456251"/>
+                  </a:lnTo>
+                  <a:lnTo>
+                    <a:pt x="5371689" y="2449042"/>
+                  </a:lnTo>
+                  <a:lnTo>
+                    <a:pt x="5443311" y="2441783"/>
+                  </a:lnTo>
+                  <a:lnTo>
+                    <a:pt x="5514934" y="2434473"/>
+                  </a:lnTo>
+                  <a:lnTo>
+                    <a:pt x="5586557" y="2427111"/>
+                  </a:lnTo>
+                  <a:lnTo>
+                    <a:pt x="5658179" y="2419698"/>
+                  </a:lnTo>
+                  <a:lnTo>
+                    <a:pt x="5729802" y="2412233"/>
+                  </a:lnTo>
+                  <a:lnTo>
+                    <a:pt x="5801424" y="2404716"/>
+                  </a:lnTo>
+                  <a:lnTo>
+                    <a:pt x="5873047" y="2397146"/>
+                  </a:lnTo>
+                  <a:lnTo>
+                    <a:pt x="5944669" y="2389523"/>
+                  </a:lnTo>
+                  <a:lnTo>
+                    <a:pt x="6016292" y="2381846"/>
+                  </a:lnTo>
+                  <a:lnTo>
+                    <a:pt x="6087914" y="2374115"/>
+                  </a:lnTo>
+                  <a:lnTo>
+                    <a:pt x="6159537" y="2366331"/>
+                  </a:lnTo>
+                  <a:lnTo>
+                    <a:pt x="6231159" y="2358491"/>
+                  </a:lnTo>
+                  <a:lnTo>
+                    <a:pt x="6302782" y="2350597"/>
+                  </a:lnTo>
+                  <a:lnTo>
+                    <a:pt x="6374404" y="2342647"/>
+                  </a:lnTo>
+                  <a:lnTo>
+                    <a:pt x="6446027" y="2334641"/>
+                  </a:lnTo>
+                  <a:lnTo>
+                    <a:pt x="6517649" y="2326579"/>
+                  </a:lnTo>
+                  <a:lnTo>
+                    <a:pt x="6589272" y="2318461"/>
+                  </a:lnTo>
+                  <a:lnTo>
+                    <a:pt x="6660894" y="2310286"/>
+                  </a:lnTo>
+                  <a:lnTo>
+                    <a:pt x="6732517" y="2302053"/>
+                  </a:lnTo>
+                  <a:lnTo>
+                    <a:pt x="6804139" y="2293763"/>
+                  </a:lnTo>
+                  <a:lnTo>
+                    <a:pt x="6875762" y="2285414"/>
+                  </a:lnTo>
+                  <a:lnTo>
+                    <a:pt x="6947385" y="2277007"/>
+                  </a:lnTo>
+                  <a:lnTo>
+                    <a:pt x="7019007" y="2268541"/>
+                  </a:lnTo>
+                  <a:lnTo>
+                    <a:pt x="7090630" y="2260016"/>
+                  </a:lnTo>
+                  <a:lnTo>
+                    <a:pt x="7090630" y="3483276"/>
+                  </a:lnTo>
+                  <a:lnTo>
+                    <a:pt x="7019007" y="3483208"/>
+                  </a:lnTo>
+                  <a:lnTo>
+                    <a:pt x="6947385" y="3483130"/>
+                  </a:lnTo>
+                  <a:lnTo>
+                    <a:pt x="6875762" y="3483042"/>
+                  </a:lnTo>
+                  <a:lnTo>
+                    <a:pt x="6804139" y="3482940"/>
+                  </a:lnTo>
+                  <a:lnTo>
+                    <a:pt x="6732517" y="3482824"/>
+                  </a:lnTo>
+                  <a:lnTo>
+                    <a:pt x="6660894" y="3482692"/>
+                  </a:lnTo>
+                  <a:lnTo>
+                    <a:pt x="6589272" y="3482540"/>
+                  </a:lnTo>
+                  <a:lnTo>
+                    <a:pt x="6517649" y="3482367"/>
+                  </a:lnTo>
+                  <a:lnTo>
+                    <a:pt x="6446027" y="3482168"/>
+                  </a:lnTo>
+                  <a:lnTo>
+                    <a:pt x="6374404" y="3481941"/>
+                  </a:lnTo>
+                  <a:lnTo>
+                    <a:pt x="6302782" y="3481682"/>
+                  </a:lnTo>
+                  <a:lnTo>
+                    <a:pt x="6231159" y="3481385"/>
+                  </a:lnTo>
+                  <a:lnTo>
+                    <a:pt x="6159537" y="3481045"/>
+                  </a:lnTo>
+                  <a:lnTo>
+                    <a:pt x="6087914" y="3480657"/>
+                  </a:lnTo>
+                  <a:lnTo>
+                    <a:pt x="6016292" y="3480213"/>
+                  </a:lnTo>
+                  <a:lnTo>
+                    <a:pt x="5944669" y="3479704"/>
+                  </a:lnTo>
+                  <a:lnTo>
+                    <a:pt x="5873047" y="3479123"/>
+                  </a:lnTo>
+                  <a:lnTo>
+                    <a:pt x="5801424" y="3478458"/>
+                  </a:lnTo>
+                  <a:lnTo>
+                    <a:pt x="5729802" y="3477698"/>
+                  </a:lnTo>
+                  <a:lnTo>
+                    <a:pt x="5658179" y="3476828"/>
+                  </a:lnTo>
+                  <a:lnTo>
+                    <a:pt x="5586557" y="3475833"/>
+                  </a:lnTo>
+                  <a:lnTo>
+                    <a:pt x="5514934" y="3474695"/>
+                  </a:lnTo>
+                  <a:lnTo>
+                    <a:pt x="5443311" y="3473394"/>
+                  </a:lnTo>
+                  <a:lnTo>
+                    <a:pt x="5371689" y="3471905"/>
+                  </a:lnTo>
+                  <a:lnTo>
+                    <a:pt x="5300066" y="3470202"/>
+                  </a:lnTo>
+                  <a:lnTo>
+                    <a:pt x="5228444" y="3468254"/>
+                  </a:lnTo>
+                  <a:lnTo>
+                    <a:pt x="5156821" y="3466026"/>
+                  </a:lnTo>
+                  <a:lnTo>
+                    <a:pt x="5085199" y="3463478"/>
+                  </a:lnTo>
+                  <a:lnTo>
+                    <a:pt x="5013576" y="3460563"/>
+                  </a:lnTo>
+                  <a:lnTo>
+                    <a:pt x="4941954" y="3457229"/>
+                  </a:lnTo>
+                  <a:lnTo>
+                    <a:pt x="4870331" y="3453415"/>
+                  </a:lnTo>
+                  <a:lnTo>
+                    <a:pt x="4798709" y="3449054"/>
+                  </a:lnTo>
+                  <a:lnTo>
+                    <a:pt x="4727086" y="3444065"/>
+                  </a:lnTo>
+                  <a:lnTo>
+                    <a:pt x="4655464" y="3438358"/>
+                  </a:lnTo>
+                  <a:lnTo>
+                    <a:pt x="4583841" y="3431831"/>
+                  </a:lnTo>
+                  <a:lnTo>
+                    <a:pt x="4512219" y="3424365"/>
+                  </a:lnTo>
+                  <a:lnTo>
+                    <a:pt x="4440596" y="3415825"/>
+                  </a:lnTo>
+                  <a:lnTo>
+                    <a:pt x="4368974" y="3406058"/>
+                  </a:lnTo>
+                  <a:lnTo>
+                    <a:pt x="4297351" y="3394885"/>
+                  </a:lnTo>
+                  <a:lnTo>
+                    <a:pt x="4225729" y="3382106"/>
+                  </a:lnTo>
+                  <a:lnTo>
+                    <a:pt x="4154106" y="3367490"/>
+                  </a:lnTo>
+                  <a:lnTo>
+                    <a:pt x="4082483" y="3350771"/>
+                  </a:lnTo>
+                  <a:lnTo>
+                    <a:pt x="4010861" y="3331648"/>
+                  </a:lnTo>
+                  <a:lnTo>
+                    <a:pt x="3939238" y="3309775"/>
+                  </a:lnTo>
+                  <a:lnTo>
+                    <a:pt x="3867616" y="3284756"/>
+                  </a:lnTo>
+                  <a:lnTo>
+                    <a:pt x="3795993" y="3256140"/>
+                  </a:lnTo>
+                  <a:lnTo>
+                    <a:pt x="3724371" y="3223408"/>
+                  </a:lnTo>
+                  <a:lnTo>
+                    <a:pt x="3652748" y="3185969"/>
+                  </a:lnTo>
+                  <a:lnTo>
+                    <a:pt x="3581126" y="3143146"/>
+                  </a:lnTo>
+                  <a:lnTo>
+                    <a:pt x="3509503" y="3094165"/>
+                  </a:lnTo>
+                  <a:lnTo>
+                    <a:pt x="3437881" y="3038140"/>
+                  </a:lnTo>
+                  <a:lnTo>
+                    <a:pt x="3366258" y="2974058"/>
+                  </a:lnTo>
+                  <a:lnTo>
+                    <a:pt x="3294636" y="2900761"/>
+                  </a:lnTo>
+                  <a:lnTo>
+                    <a:pt x="3223013" y="2816923"/>
+                  </a:lnTo>
+                  <a:lnTo>
+                    <a:pt x="3151391" y="2721028"/>
+                  </a:lnTo>
+                  <a:lnTo>
+                    <a:pt x="3079768" y="2656458"/>
+                  </a:lnTo>
+                  <a:lnTo>
+                    <a:pt x="3008146" y="2662222"/>
+                  </a:lnTo>
+                  <a:lnTo>
+                    <a:pt x="2936523" y="2667945"/>
+                  </a:lnTo>
+                  <a:lnTo>
+                    <a:pt x="2864901" y="2673629"/>
+                  </a:lnTo>
+                  <a:lnTo>
+                    <a:pt x="2793278" y="2679273"/>
+                  </a:lnTo>
+                  <a:lnTo>
+                    <a:pt x="2721655" y="2684877"/>
+                  </a:lnTo>
+                  <a:lnTo>
+                    <a:pt x="2650033" y="2690443"/>
+                  </a:lnTo>
+                  <a:lnTo>
+                    <a:pt x="2578410" y="2695970"/>
+                  </a:lnTo>
+                  <a:lnTo>
+                    <a:pt x="2506788" y="2701458"/>
+                  </a:lnTo>
+                  <a:lnTo>
+                    <a:pt x="2435165" y="2706908"/>
+                  </a:lnTo>
+                  <a:lnTo>
+                    <a:pt x="2363543" y="2712320"/>
+                  </a:lnTo>
+                  <a:lnTo>
+                    <a:pt x="2291920" y="2717695"/>
+                  </a:lnTo>
+                  <a:lnTo>
+                    <a:pt x="2220298" y="2723031"/>
+                  </a:lnTo>
+                  <a:lnTo>
+                    <a:pt x="2148675" y="2728331"/>
+                  </a:lnTo>
+                  <a:lnTo>
+                    <a:pt x="2077053" y="2733594"/>
+                  </a:lnTo>
+                  <a:lnTo>
+                    <a:pt x="2005430" y="2738820"/>
+                  </a:lnTo>
+                  <a:lnTo>
+                    <a:pt x="1933808" y="2744010"/>
+                  </a:lnTo>
+                  <a:lnTo>
+                    <a:pt x="1862185" y="2749164"/>
+                  </a:lnTo>
+                  <a:lnTo>
+                    <a:pt x="1790563" y="2754281"/>
+                  </a:lnTo>
+                  <a:lnTo>
+                    <a:pt x="1718940" y="2759363"/>
+                  </a:lnTo>
+                  <a:lnTo>
+                    <a:pt x="1647318" y="2764410"/>
+                  </a:lnTo>
+                  <a:lnTo>
+                    <a:pt x="1575695" y="2769421"/>
+                  </a:lnTo>
+                  <a:lnTo>
+                    <a:pt x="1504073" y="2774398"/>
+                  </a:lnTo>
+                  <a:lnTo>
+                    <a:pt x="1432450" y="2779340"/>
+                  </a:lnTo>
+                  <a:lnTo>
+                    <a:pt x="1360827" y="2784247"/>
+                  </a:lnTo>
+                  <a:lnTo>
+                    <a:pt x="1289205" y="2789121"/>
+                  </a:lnTo>
+                  <a:lnTo>
+                    <a:pt x="1217582" y="2793960"/>
+                  </a:lnTo>
+                  <a:lnTo>
+                    <a:pt x="1145960" y="2798766"/>
+                  </a:lnTo>
+                  <a:lnTo>
+                    <a:pt x="1074337" y="2803538"/>
+                  </a:lnTo>
+                  <a:lnTo>
+                    <a:pt x="1002715" y="2808277"/>
+                  </a:lnTo>
+                  <a:lnTo>
+                    <a:pt x="931092" y="2812982"/>
+                  </a:lnTo>
+                  <a:lnTo>
+                    <a:pt x="859470" y="2817656"/>
+                  </a:lnTo>
+                  <a:lnTo>
+                    <a:pt x="787847" y="2822296"/>
+                  </a:lnTo>
+                  <a:lnTo>
+                    <a:pt x="716225" y="2826904"/>
+                  </a:lnTo>
+                  <a:lnTo>
+                    <a:pt x="644602" y="2831480"/>
+                  </a:lnTo>
+                  <a:lnTo>
+                    <a:pt x="572980" y="2836025"/>
+                  </a:lnTo>
+                  <a:lnTo>
+                    <a:pt x="501357" y="2840537"/>
+                  </a:lnTo>
+                  <a:lnTo>
+                    <a:pt x="429735" y="2845018"/>
+                  </a:lnTo>
+                  <a:lnTo>
+                    <a:pt x="358112" y="2849468"/>
+                  </a:lnTo>
+                  <a:lnTo>
+                    <a:pt x="286490" y="2853887"/>
+                  </a:lnTo>
+                  <a:lnTo>
+                    <a:pt x="214867" y="2858275"/>
+                  </a:lnTo>
+                  <a:lnTo>
+                    <a:pt x="143245" y="2862633"/>
+                  </a:lnTo>
+                  <a:lnTo>
+                    <a:pt x="71622" y="2866960"/>
+                  </a:lnTo>
+                  <a:lnTo>
+                    <a:pt x="0" y="2871257"/>
                   </a:lnTo>
                   <a:lnTo>
                     <a:pt x="0" y="0"/>
@@ -3927,216 +3927,216 @@
           </p:nvSpPr>
           <p:spPr>
             <a:xfrm>
-              <a:off x="3492141" y="2073503"/>
-              <a:ext cx="4770538" cy="2650290"/>
+              <a:off x="3514760" y="2073503"/>
+              <a:ext cx="4747919" cy="2650654"/>
             </a:xfrm>
             <a:custGeom>
               <a:avLst/>
               <a:pathLst>
-                <a:path w="4770538" h="2650290">
+                <a:path w="4747919" h="2650654">
                   <a:moveTo>
                     <a:pt x="0" y="0"/>
                   </a:moveTo>
                   <a:lnTo>
-                    <a:pt x="43451" y="280126"/>
-                  </a:lnTo>
-                  <a:lnTo>
-                    <a:pt x="115074" y="683700"/>
-                  </a:lnTo>
-                  <a:lnTo>
-                    <a:pt x="186696" y="1036434"/>
-                  </a:lnTo>
-                  <a:lnTo>
-                    <a:pt x="258319" y="1344733"/>
-                  </a:lnTo>
-                  <a:lnTo>
-                    <a:pt x="329941" y="1614194"/>
-                  </a:lnTo>
-                  <a:lnTo>
-                    <a:pt x="401564" y="1849709"/>
-                  </a:lnTo>
-                  <a:lnTo>
-                    <a:pt x="473186" y="2055556"/>
-                  </a:lnTo>
-                  <a:lnTo>
-                    <a:pt x="544809" y="2235472"/>
-                  </a:lnTo>
-                  <a:lnTo>
-                    <a:pt x="616431" y="2392722"/>
-                  </a:lnTo>
-                  <a:lnTo>
-                    <a:pt x="688054" y="2530163"/>
-                  </a:lnTo>
-                  <a:lnTo>
-                    <a:pt x="759676" y="2650290"/>
-                  </a:lnTo>
-                  <a:lnTo>
-                    <a:pt x="831299" y="2648517"/>
-                  </a:lnTo>
-                  <a:lnTo>
-                    <a:pt x="902921" y="2642496"/>
-                  </a:lnTo>
-                  <a:lnTo>
-                    <a:pt x="974544" y="2636432"/>
-                  </a:lnTo>
-                  <a:lnTo>
-                    <a:pt x="1046166" y="2630324"/>
-                  </a:lnTo>
-                  <a:lnTo>
-                    <a:pt x="1117789" y="2624172"/>
-                  </a:lnTo>
-                  <a:lnTo>
-                    <a:pt x="1189411" y="2617975"/>
-                  </a:lnTo>
-                  <a:lnTo>
-                    <a:pt x="1261034" y="2611734"/>
-                  </a:lnTo>
-                  <a:lnTo>
-                    <a:pt x="1332656" y="2605448"/>
-                  </a:lnTo>
-                  <a:lnTo>
-                    <a:pt x="1404279" y="2599117"/>
-                  </a:lnTo>
-                  <a:lnTo>
-                    <a:pt x="1475902" y="2592739"/>
-                  </a:lnTo>
-                  <a:lnTo>
-                    <a:pt x="1547524" y="2586316"/>
-                  </a:lnTo>
-                  <a:lnTo>
-                    <a:pt x="1619147" y="2579847"/>
-                  </a:lnTo>
-                  <a:lnTo>
-                    <a:pt x="1690769" y="2573331"/>
-                  </a:lnTo>
-                  <a:lnTo>
-                    <a:pt x="1762392" y="2566768"/>
-                  </a:lnTo>
-                  <a:lnTo>
-                    <a:pt x="1834014" y="2560158"/>
-                  </a:lnTo>
-                  <a:lnTo>
-                    <a:pt x="1905637" y="2553500"/>
-                  </a:lnTo>
-                  <a:lnTo>
-                    <a:pt x="1977259" y="2546794"/>
-                  </a:lnTo>
-                  <a:lnTo>
-                    <a:pt x="2048882" y="2540040"/>
-                  </a:lnTo>
-                  <a:lnTo>
-                    <a:pt x="2120504" y="2533237"/>
-                  </a:lnTo>
-                  <a:lnTo>
-                    <a:pt x="2192127" y="2526385"/>
-                  </a:lnTo>
-                  <a:lnTo>
-                    <a:pt x="2263749" y="2519483"/>
-                  </a:lnTo>
-                  <a:lnTo>
-                    <a:pt x="2335372" y="2512532"/>
-                  </a:lnTo>
-                  <a:lnTo>
-                    <a:pt x="2406994" y="2505531"/>
-                  </a:lnTo>
-                  <a:lnTo>
-                    <a:pt x="2478617" y="2498479"/>
-                  </a:lnTo>
-                  <a:lnTo>
-                    <a:pt x="2550239" y="2491376"/>
-                  </a:lnTo>
-                  <a:lnTo>
-                    <a:pt x="2621862" y="2484223"/>
-                  </a:lnTo>
-                  <a:lnTo>
-                    <a:pt x="2693484" y="2477017"/>
-                  </a:lnTo>
-                  <a:lnTo>
-                    <a:pt x="2765107" y="2469760"/>
-                  </a:lnTo>
-                  <a:lnTo>
-                    <a:pt x="2836729" y="2462450"/>
-                  </a:lnTo>
-                  <a:lnTo>
-                    <a:pt x="2908352" y="2455088"/>
-                  </a:lnTo>
-                  <a:lnTo>
-                    <a:pt x="2979975" y="2447673"/>
-                  </a:lnTo>
-                  <a:lnTo>
-                    <a:pt x="3051597" y="2440204"/>
-                  </a:lnTo>
-                  <a:lnTo>
-                    <a:pt x="3123220" y="2432681"/>
-                  </a:lnTo>
-                  <a:lnTo>
-                    <a:pt x="3194842" y="2425104"/>
-                  </a:lnTo>
-                  <a:lnTo>
-                    <a:pt x="3266465" y="2417473"/>
-                  </a:lnTo>
-                  <a:lnTo>
-                    <a:pt x="3338087" y="2409786"/>
-                  </a:lnTo>
-                  <a:lnTo>
-                    <a:pt x="3409710" y="2402044"/>
-                  </a:lnTo>
-                  <a:lnTo>
-                    <a:pt x="3481332" y="2394247"/>
-                  </a:lnTo>
-                  <a:lnTo>
-                    <a:pt x="3552955" y="2386393"/>
-                  </a:lnTo>
-                  <a:lnTo>
-                    <a:pt x="3624577" y="2378482"/>
-                  </a:lnTo>
-                  <a:lnTo>
-                    <a:pt x="3696200" y="2370514"/>
-                  </a:lnTo>
-                  <a:lnTo>
-                    <a:pt x="3767822" y="2362489"/>
-                  </a:lnTo>
-                  <a:lnTo>
-                    <a:pt x="3839445" y="2354407"/>
-                  </a:lnTo>
-                  <a:lnTo>
-                    <a:pt x="3911067" y="2346265"/>
-                  </a:lnTo>
-                  <a:lnTo>
-                    <a:pt x="3982690" y="2338065"/>
-                  </a:lnTo>
-                  <a:lnTo>
-                    <a:pt x="4054312" y="2329807"/>
-                  </a:lnTo>
-                  <a:lnTo>
-                    <a:pt x="4125935" y="2321488"/>
-                  </a:lnTo>
-                  <a:lnTo>
-                    <a:pt x="4197557" y="2313110"/>
-                  </a:lnTo>
-                  <a:lnTo>
-                    <a:pt x="4269180" y="2304671"/>
-                  </a:lnTo>
-                  <a:lnTo>
-                    <a:pt x="4340803" y="2296171"/>
-                  </a:lnTo>
-                  <a:lnTo>
-                    <a:pt x="4412425" y="2287610"/>
-                  </a:lnTo>
-                  <a:lnTo>
-                    <a:pt x="4484048" y="2278987"/>
-                  </a:lnTo>
-                  <a:lnTo>
-                    <a:pt x="4555670" y="2270303"/>
-                  </a:lnTo>
-                  <a:lnTo>
-                    <a:pt x="4627293" y="2261555"/>
-                  </a:lnTo>
-                  <a:lnTo>
-                    <a:pt x="4698915" y="2252745"/>
-                  </a:lnTo>
-                  <a:lnTo>
-                    <a:pt x="4770538" y="2243871"/>
+                    <a:pt x="20832" y="139870"/>
+                  </a:lnTo>
+                  <a:lnTo>
+                    <a:pt x="92454" y="560288"/>
+                  </a:lnTo>
+                  <a:lnTo>
+                    <a:pt x="164077" y="927847"/>
+                  </a:lnTo>
+                  <a:lnTo>
+                    <a:pt x="235700" y="1249195"/>
+                  </a:lnTo>
+                  <a:lnTo>
+                    <a:pt x="307322" y="1530140"/>
+                  </a:lnTo>
+                  <a:lnTo>
+                    <a:pt x="378945" y="1775762"/>
+                  </a:lnTo>
+                  <a:lnTo>
+                    <a:pt x="450567" y="1990503"/>
+                  </a:lnTo>
+                  <a:lnTo>
+                    <a:pt x="522190" y="2178245"/>
+                  </a:lnTo>
+                  <a:lnTo>
+                    <a:pt x="593812" y="2342383"/>
+                  </a:lnTo>
+                  <a:lnTo>
+                    <a:pt x="665435" y="2485884"/>
+                  </a:lnTo>
+                  <a:lnTo>
+                    <a:pt x="737057" y="2611343"/>
+                  </a:lnTo>
+                  <a:lnTo>
+                    <a:pt x="808680" y="2650654"/>
+                  </a:lnTo>
+                  <a:lnTo>
+                    <a:pt x="880302" y="2644810"/>
+                  </a:lnTo>
+                  <a:lnTo>
+                    <a:pt x="951925" y="2638924"/>
+                  </a:lnTo>
+                  <a:lnTo>
+                    <a:pt x="1023547" y="2632997"/>
+                  </a:lnTo>
+                  <a:lnTo>
+                    <a:pt x="1095170" y="2627028"/>
+                  </a:lnTo>
+                  <a:lnTo>
+                    <a:pt x="1166792" y="2621018"/>
+                  </a:lnTo>
+                  <a:lnTo>
+                    <a:pt x="1238415" y="2614965"/>
+                  </a:lnTo>
+                  <a:lnTo>
+                    <a:pt x="1310037" y="2608870"/>
+                  </a:lnTo>
+                  <a:lnTo>
+                    <a:pt x="1381660" y="2602732"/>
+                  </a:lnTo>
+                  <a:lnTo>
+                    <a:pt x="1453282" y="2596551"/>
+                  </a:lnTo>
+                  <a:lnTo>
+                    <a:pt x="1524905" y="2590327"/>
+                  </a:lnTo>
+                  <a:lnTo>
+                    <a:pt x="1596528" y="2584059"/>
+                  </a:lnTo>
+                  <a:lnTo>
+                    <a:pt x="1668150" y="2577747"/>
+                  </a:lnTo>
+                  <a:lnTo>
+                    <a:pt x="1739773" y="2571391"/>
+                  </a:lnTo>
+                  <a:lnTo>
+                    <a:pt x="1811395" y="2564990"/>
+                  </a:lnTo>
+                  <a:lnTo>
+                    <a:pt x="1883018" y="2558545"/>
+                  </a:lnTo>
+                  <a:lnTo>
+                    <a:pt x="1954640" y="2552054"/>
+                  </a:lnTo>
+                  <a:lnTo>
+                    <a:pt x="2026263" y="2545517"/>
+                  </a:lnTo>
+                  <a:lnTo>
+                    <a:pt x="2097885" y="2538935"/>
+                  </a:lnTo>
+                  <a:lnTo>
+                    <a:pt x="2169508" y="2532306"/>
+                  </a:lnTo>
+                  <a:lnTo>
+                    <a:pt x="2241130" y="2525631"/>
+                  </a:lnTo>
+                  <a:lnTo>
+                    <a:pt x="2312753" y="2518909"/>
+                  </a:lnTo>
+                  <a:lnTo>
+                    <a:pt x="2384375" y="2512140"/>
+                  </a:lnTo>
+                  <a:lnTo>
+                    <a:pt x="2455998" y="2505324"/>
+                  </a:lnTo>
+                  <a:lnTo>
+                    <a:pt x="2527620" y="2498460"/>
+                  </a:lnTo>
+                  <a:lnTo>
+                    <a:pt x="2599243" y="2491547"/>
+                  </a:lnTo>
+                  <a:lnTo>
+                    <a:pt x="2670865" y="2484586"/>
+                  </a:lnTo>
+                  <a:lnTo>
+                    <a:pt x="2742488" y="2477576"/>
+                  </a:lnTo>
+                  <a:lnTo>
+                    <a:pt x="2814110" y="2470518"/>
+                  </a:lnTo>
+                  <a:lnTo>
+                    <a:pt x="2885733" y="2463409"/>
+                  </a:lnTo>
+                  <a:lnTo>
+                    <a:pt x="2957356" y="2456251"/>
+                  </a:lnTo>
+                  <a:lnTo>
+                    <a:pt x="3028978" y="2449042"/>
+                  </a:lnTo>
+                  <a:lnTo>
+                    <a:pt x="3100601" y="2441783"/>
+                  </a:lnTo>
+                  <a:lnTo>
+                    <a:pt x="3172223" y="2434473"/>
+                  </a:lnTo>
+                  <a:lnTo>
+                    <a:pt x="3243846" y="2427111"/>
+                  </a:lnTo>
+                  <a:lnTo>
+                    <a:pt x="3315468" y="2419698"/>
+                  </a:lnTo>
+                  <a:lnTo>
+                    <a:pt x="3387091" y="2412233"/>
+                  </a:lnTo>
+                  <a:lnTo>
+                    <a:pt x="3458713" y="2404716"/>
+                  </a:lnTo>
+                  <a:lnTo>
+                    <a:pt x="3530336" y="2397146"/>
+                  </a:lnTo>
+                  <a:lnTo>
+                    <a:pt x="3601958" y="2389523"/>
+                  </a:lnTo>
+                  <a:lnTo>
+                    <a:pt x="3673581" y="2381846"/>
+                  </a:lnTo>
+                  <a:lnTo>
+                    <a:pt x="3745203" y="2374115"/>
+                  </a:lnTo>
+                  <a:lnTo>
+                    <a:pt x="3816826" y="2366331"/>
+                  </a:lnTo>
+                  <a:lnTo>
+                    <a:pt x="3888448" y="2358491"/>
+                  </a:lnTo>
+                  <a:lnTo>
+                    <a:pt x="3960071" y="2350597"/>
+                  </a:lnTo>
+                  <a:lnTo>
+                    <a:pt x="4031693" y="2342647"/>
+                  </a:lnTo>
+                  <a:lnTo>
+                    <a:pt x="4103316" y="2334641"/>
+                  </a:lnTo>
+                  <a:lnTo>
+                    <a:pt x="4174938" y="2326579"/>
+                  </a:lnTo>
+                  <a:lnTo>
+                    <a:pt x="4246561" y="2318461"/>
+                  </a:lnTo>
+                  <a:lnTo>
+                    <a:pt x="4318184" y="2310286"/>
+                  </a:lnTo>
+                  <a:lnTo>
+                    <a:pt x="4389806" y="2302053"/>
+                  </a:lnTo>
+                  <a:lnTo>
+                    <a:pt x="4461429" y="2293763"/>
+                  </a:lnTo>
+                  <a:lnTo>
+                    <a:pt x="4533051" y="2285414"/>
+                  </a:lnTo>
+                  <a:lnTo>
+                    <a:pt x="4604674" y="2277007"/>
+                  </a:lnTo>
+                  <a:lnTo>
+                    <a:pt x="4676296" y="2268541"/>
+                  </a:lnTo>
+                  <a:lnTo>
+                    <a:pt x="4747919" y="2260016"/>
                   </a:lnTo>
                 </a:path>
               </a:pathLst>
@@ -4156,312 +4156,312 @@
           </p:nvSpPr>
           <p:spPr>
             <a:xfrm>
-              <a:off x="1172049" y="4727998"/>
-              <a:ext cx="7090630" cy="828808"/>
+              <a:off x="1172049" y="4729961"/>
+              <a:ext cx="7090630" cy="826817"/>
             </a:xfrm>
             <a:custGeom>
               <a:avLst/>
               <a:pathLst>
-                <a:path w="7090630" h="828808">
+                <a:path w="7090630" h="826817">
                   <a:moveTo>
-                    <a:pt x="7090630" y="828808"/>
+                    <a:pt x="7090630" y="826817"/>
                   </a:moveTo>
                   <a:lnTo>
-                    <a:pt x="7019007" y="828744"/>
-                  </a:lnTo>
-                  <a:lnTo>
-                    <a:pt x="6947385" y="828671"/>
-                  </a:lnTo>
-                  <a:lnTo>
-                    <a:pt x="6875762" y="828587"/>
-                  </a:lnTo>
-                  <a:lnTo>
-                    <a:pt x="6804139" y="828492"/>
-                  </a:lnTo>
-                  <a:lnTo>
-                    <a:pt x="6732517" y="828382"/>
-                  </a:lnTo>
-                  <a:lnTo>
-                    <a:pt x="6660894" y="828257"/>
-                  </a:lnTo>
-                  <a:lnTo>
-                    <a:pt x="6589272" y="828114"/>
-                  </a:lnTo>
-                  <a:lnTo>
-                    <a:pt x="6517649" y="827950"/>
-                  </a:lnTo>
-                  <a:lnTo>
-                    <a:pt x="6446027" y="827763"/>
-                  </a:lnTo>
-                  <a:lnTo>
-                    <a:pt x="6374404" y="827548"/>
-                  </a:lnTo>
-                  <a:lnTo>
-                    <a:pt x="6302782" y="827303"/>
-                  </a:lnTo>
-                  <a:lnTo>
-                    <a:pt x="6231159" y="827022"/>
-                  </a:lnTo>
-                  <a:lnTo>
-                    <a:pt x="6159537" y="826701"/>
-                  </a:lnTo>
-                  <a:lnTo>
-                    <a:pt x="6087914" y="826334"/>
-                  </a:lnTo>
-                  <a:lnTo>
-                    <a:pt x="6016292" y="825913"/>
-                  </a:lnTo>
-                  <a:lnTo>
-                    <a:pt x="5944669" y="825432"/>
-                  </a:lnTo>
-                  <a:lnTo>
-                    <a:pt x="5873047" y="824882"/>
-                  </a:lnTo>
-                  <a:lnTo>
-                    <a:pt x="5801424" y="824253"/>
-                  </a:lnTo>
-                  <a:lnTo>
-                    <a:pt x="5729802" y="823532"/>
-                  </a:lnTo>
-                  <a:lnTo>
-                    <a:pt x="5658179" y="822708"/>
-                  </a:lnTo>
-                  <a:lnTo>
-                    <a:pt x="5586557" y="821765"/>
-                  </a:lnTo>
-                  <a:lnTo>
-                    <a:pt x="5514934" y="820686"/>
-                  </a:lnTo>
-                  <a:lnTo>
-                    <a:pt x="5443311" y="819452"/>
-                  </a:lnTo>
-                  <a:lnTo>
-                    <a:pt x="5371689" y="818039"/>
-                  </a:lnTo>
-                  <a:lnTo>
-                    <a:pt x="5300066" y="816423"/>
-                  </a:lnTo>
-                  <a:lnTo>
-                    <a:pt x="5228444" y="814575"/>
-                  </a:lnTo>
-                  <a:lnTo>
-                    <a:pt x="5156821" y="812459"/>
-                  </a:lnTo>
-                  <a:lnTo>
-                    <a:pt x="5085199" y="810039"/>
-                  </a:lnTo>
-                  <a:lnTo>
-                    <a:pt x="5013576" y="807270"/>
-                  </a:lnTo>
-                  <a:lnTo>
-                    <a:pt x="4941954" y="804102"/>
-                  </a:lnTo>
-                  <a:lnTo>
-                    <a:pt x="4870331" y="800477"/>
-                  </a:lnTo>
-                  <a:lnTo>
-                    <a:pt x="4798709" y="796330"/>
-                  </a:lnTo>
-                  <a:lnTo>
-                    <a:pt x="4727086" y="791586"/>
-                  </a:lnTo>
-                  <a:lnTo>
-                    <a:pt x="4655464" y="786157"/>
-                  </a:lnTo>
-                  <a:lnTo>
-                    <a:pt x="4583841" y="779946"/>
-                  </a:lnTo>
-                  <a:lnTo>
-                    <a:pt x="4512219" y="772839"/>
-                  </a:lnTo>
-                  <a:lnTo>
-                    <a:pt x="4440596" y="764709"/>
-                  </a:lnTo>
-                  <a:lnTo>
-                    <a:pt x="4368974" y="755406"/>
-                  </a:lnTo>
-                  <a:lnTo>
-                    <a:pt x="4297351" y="744763"/>
-                  </a:lnTo>
-                  <a:lnTo>
-                    <a:pt x="4225729" y="732586"/>
-                  </a:lnTo>
-                  <a:lnTo>
-                    <a:pt x="4154106" y="718653"/>
-                  </a:lnTo>
-                  <a:lnTo>
-                    <a:pt x="4082483" y="702713"/>
-                  </a:lnTo>
-                  <a:lnTo>
-                    <a:pt x="4010861" y="684475"/>
-                  </a:lnTo>
-                  <a:lnTo>
-                    <a:pt x="3939238" y="663608"/>
-                  </a:lnTo>
-                  <a:lnTo>
-                    <a:pt x="3867616" y="639733"/>
-                  </a:lnTo>
-                  <a:lnTo>
-                    <a:pt x="3795993" y="612418"/>
-                  </a:lnTo>
-                  <a:lnTo>
-                    <a:pt x="3724371" y="581166"/>
-                  </a:lnTo>
-                  <a:lnTo>
-                    <a:pt x="3652748" y="545409"/>
-                  </a:lnTo>
-                  <a:lnTo>
-                    <a:pt x="3581126" y="504499"/>
-                  </a:lnTo>
-                  <a:lnTo>
-                    <a:pt x="3509503" y="457692"/>
-                  </a:lnTo>
-                  <a:lnTo>
-                    <a:pt x="3437881" y="404138"/>
-                  </a:lnTo>
-                  <a:lnTo>
-                    <a:pt x="3366258" y="342867"/>
-                  </a:lnTo>
-                  <a:lnTo>
-                    <a:pt x="3294636" y="272763"/>
-                  </a:lnTo>
-                  <a:lnTo>
-                    <a:pt x="3223013" y="192556"/>
-                  </a:lnTo>
-                  <a:lnTo>
-                    <a:pt x="3151391" y="100789"/>
+                    <a:pt x="7019007" y="826749"/>
+                  </a:lnTo>
+                  <a:lnTo>
+                    <a:pt x="6947385" y="826671"/>
+                  </a:lnTo>
+                  <a:lnTo>
+                    <a:pt x="6875762" y="826583"/>
+                  </a:lnTo>
+                  <a:lnTo>
+                    <a:pt x="6804139" y="826482"/>
+                  </a:lnTo>
+                  <a:lnTo>
+                    <a:pt x="6732517" y="826366"/>
+                  </a:lnTo>
+                  <a:lnTo>
+                    <a:pt x="6660894" y="826233"/>
+                  </a:lnTo>
+                  <a:lnTo>
+                    <a:pt x="6589272" y="826081"/>
+                  </a:lnTo>
+                  <a:lnTo>
+                    <a:pt x="6517649" y="825908"/>
+                  </a:lnTo>
+                  <a:lnTo>
+                    <a:pt x="6446027" y="825710"/>
+                  </a:lnTo>
+                  <a:lnTo>
+                    <a:pt x="6374404" y="825483"/>
+                  </a:lnTo>
+                  <a:lnTo>
+                    <a:pt x="6302782" y="825223"/>
+                  </a:lnTo>
+                  <a:lnTo>
+                    <a:pt x="6231159" y="824926"/>
+                  </a:lnTo>
+                  <a:lnTo>
+                    <a:pt x="6159537" y="824587"/>
+                  </a:lnTo>
+                  <a:lnTo>
+                    <a:pt x="6087914" y="824198"/>
+                  </a:lnTo>
+                  <a:lnTo>
+                    <a:pt x="6016292" y="823754"/>
+                  </a:lnTo>
+                  <a:lnTo>
+                    <a:pt x="5944669" y="823246"/>
+                  </a:lnTo>
+                  <a:lnTo>
+                    <a:pt x="5873047" y="822664"/>
+                  </a:lnTo>
+                  <a:lnTo>
+                    <a:pt x="5801424" y="822000"/>
+                  </a:lnTo>
+                  <a:lnTo>
+                    <a:pt x="5729802" y="821239"/>
+                  </a:lnTo>
+                  <a:lnTo>
+                    <a:pt x="5658179" y="820369"/>
+                  </a:lnTo>
+                  <a:lnTo>
+                    <a:pt x="5586557" y="819374"/>
+                  </a:lnTo>
+                  <a:lnTo>
+                    <a:pt x="5514934" y="818236"/>
+                  </a:lnTo>
+                  <a:lnTo>
+                    <a:pt x="5443311" y="816935"/>
+                  </a:lnTo>
+                  <a:lnTo>
+                    <a:pt x="5371689" y="815446"/>
+                  </a:lnTo>
+                  <a:lnTo>
+                    <a:pt x="5300066" y="813743"/>
+                  </a:lnTo>
+                  <a:lnTo>
+                    <a:pt x="5228444" y="811795"/>
+                  </a:lnTo>
+                  <a:lnTo>
+                    <a:pt x="5156821" y="809567"/>
+                  </a:lnTo>
+                  <a:lnTo>
+                    <a:pt x="5085199" y="807019"/>
+                  </a:lnTo>
+                  <a:lnTo>
+                    <a:pt x="5013576" y="804104"/>
+                  </a:lnTo>
+                  <a:lnTo>
+                    <a:pt x="4941954" y="800770"/>
+                  </a:lnTo>
+                  <a:lnTo>
+                    <a:pt x="4870331" y="796957"/>
+                  </a:lnTo>
+                  <a:lnTo>
+                    <a:pt x="4798709" y="792595"/>
+                  </a:lnTo>
+                  <a:lnTo>
+                    <a:pt x="4727086" y="787606"/>
+                  </a:lnTo>
+                  <a:lnTo>
+                    <a:pt x="4655464" y="781899"/>
+                  </a:lnTo>
+                  <a:lnTo>
+                    <a:pt x="4583841" y="775372"/>
+                  </a:lnTo>
+                  <a:lnTo>
+                    <a:pt x="4512219" y="767906"/>
+                  </a:lnTo>
+                  <a:lnTo>
+                    <a:pt x="4440596" y="759366"/>
+                  </a:lnTo>
+                  <a:lnTo>
+                    <a:pt x="4368974" y="749599"/>
+                  </a:lnTo>
+                  <a:lnTo>
+                    <a:pt x="4297351" y="738426"/>
+                  </a:lnTo>
+                  <a:lnTo>
+                    <a:pt x="4225729" y="725647"/>
+                  </a:lnTo>
+                  <a:lnTo>
+                    <a:pt x="4154106" y="711031"/>
+                  </a:lnTo>
+                  <a:lnTo>
+                    <a:pt x="4082483" y="694312"/>
+                  </a:lnTo>
+                  <a:lnTo>
+                    <a:pt x="4010861" y="675189"/>
+                  </a:lnTo>
+                  <a:lnTo>
+                    <a:pt x="3939238" y="653316"/>
+                  </a:lnTo>
+                  <a:lnTo>
+                    <a:pt x="3867616" y="628297"/>
+                  </a:lnTo>
+                  <a:lnTo>
+                    <a:pt x="3795993" y="599681"/>
+                  </a:lnTo>
+                  <a:lnTo>
+                    <a:pt x="3724371" y="566949"/>
+                  </a:lnTo>
+                  <a:lnTo>
+                    <a:pt x="3652748" y="529510"/>
+                  </a:lnTo>
+                  <a:lnTo>
+                    <a:pt x="3581126" y="486688"/>
+                  </a:lnTo>
+                  <a:lnTo>
+                    <a:pt x="3509503" y="437706"/>
+                  </a:lnTo>
+                  <a:lnTo>
+                    <a:pt x="3437881" y="381681"/>
+                  </a:lnTo>
+                  <a:lnTo>
+                    <a:pt x="3366258" y="317600"/>
+                  </a:lnTo>
+                  <a:lnTo>
+                    <a:pt x="3294636" y="244302"/>
+                  </a:lnTo>
+                  <a:lnTo>
+                    <a:pt x="3223013" y="160464"/>
+                  </a:lnTo>
+                  <a:lnTo>
+                    <a:pt x="3151391" y="64569"/>
                   </a:lnTo>
                   <a:lnTo>
                     <a:pt x="3079768" y="0"/>
                   </a:lnTo>
                   <a:lnTo>
-                    <a:pt x="3008146" y="5935"/>
-                  </a:lnTo>
-                  <a:lnTo>
-                    <a:pt x="2936523" y="11827"/>
-                  </a:lnTo>
-                  <a:lnTo>
-                    <a:pt x="2864901" y="17678"/>
-                  </a:lnTo>
-                  <a:lnTo>
-                    <a:pt x="2793278" y="23486"/>
-                  </a:lnTo>
-                  <a:lnTo>
-                    <a:pt x="2721655" y="29253"/>
-                  </a:lnTo>
-                  <a:lnTo>
-                    <a:pt x="2650033" y="34979"/>
-                  </a:lnTo>
-                  <a:lnTo>
-                    <a:pt x="2578410" y="40664"/>
-                  </a:lnTo>
-                  <a:lnTo>
-                    <a:pt x="2506788" y="46308"/>
-                  </a:lnTo>
-                  <a:lnTo>
-                    <a:pt x="2435165" y="51911"/>
-                  </a:lnTo>
-                  <a:lnTo>
-                    <a:pt x="2363543" y="57475"/>
-                  </a:lnTo>
-                  <a:lnTo>
-                    <a:pt x="2291920" y="62999"/>
-                  </a:lnTo>
-                  <a:lnTo>
-                    <a:pt x="2220298" y="68483"/>
-                  </a:lnTo>
-                  <a:lnTo>
-                    <a:pt x="2148675" y="73928"/>
-                  </a:lnTo>
-                  <a:lnTo>
-                    <a:pt x="2077053" y="79334"/>
-                  </a:lnTo>
-                  <a:lnTo>
-                    <a:pt x="2005430" y="84701"/>
-                  </a:lnTo>
-                  <a:lnTo>
-                    <a:pt x="1933808" y="90030"/>
-                  </a:lnTo>
-                  <a:lnTo>
-                    <a:pt x="1862185" y="95321"/>
-                  </a:lnTo>
-                  <a:lnTo>
-                    <a:pt x="1790563" y="100574"/>
-                  </a:lnTo>
-                  <a:lnTo>
-                    <a:pt x="1718940" y="105789"/>
-                  </a:lnTo>
-                  <a:lnTo>
-                    <a:pt x="1647318" y="110967"/>
-                  </a:lnTo>
-                  <a:lnTo>
-                    <a:pt x="1575695" y="116108"/>
-                  </a:lnTo>
-                  <a:lnTo>
-                    <a:pt x="1504073" y="121212"/>
-                  </a:lnTo>
-                  <a:lnTo>
-                    <a:pt x="1432450" y="126279"/>
-                  </a:lnTo>
-                  <a:lnTo>
-                    <a:pt x="1360827" y="131311"/>
-                  </a:lnTo>
-                  <a:lnTo>
-                    <a:pt x="1289205" y="136306"/>
-                  </a:lnTo>
-                  <a:lnTo>
-                    <a:pt x="1217582" y="141266"/>
-                  </a:lnTo>
-                  <a:lnTo>
-                    <a:pt x="1145960" y="146190"/>
-                  </a:lnTo>
-                  <a:lnTo>
-                    <a:pt x="1074337" y="151078"/>
-                  </a:lnTo>
-                  <a:lnTo>
-                    <a:pt x="1002715" y="155932"/>
-                  </a:lnTo>
-                  <a:lnTo>
-                    <a:pt x="931092" y="160751"/>
-                  </a:lnTo>
-                  <a:lnTo>
-                    <a:pt x="859470" y="165536"/>
-                  </a:lnTo>
-                  <a:lnTo>
-                    <a:pt x="787847" y="170286"/>
-                  </a:lnTo>
-                  <a:lnTo>
-                    <a:pt x="716225" y="175003"/>
-                  </a:lnTo>
-                  <a:lnTo>
-                    <a:pt x="644602" y="179685"/>
-                  </a:lnTo>
-                  <a:lnTo>
-                    <a:pt x="572980" y="184334"/>
-                  </a:lnTo>
-                  <a:lnTo>
-                    <a:pt x="501357" y="188950"/>
-                  </a:lnTo>
-                  <a:lnTo>
-                    <a:pt x="429735" y="193533"/>
-                  </a:lnTo>
-                  <a:lnTo>
-                    <a:pt x="358112" y="198083"/>
-                  </a:lnTo>
-                  <a:lnTo>
-                    <a:pt x="286490" y="202600"/>
-                  </a:lnTo>
-                  <a:lnTo>
-                    <a:pt x="214867" y="207085"/>
-                  </a:lnTo>
-                  <a:lnTo>
-                    <a:pt x="143245" y="211538"/>
-                  </a:lnTo>
-                  <a:lnTo>
-                    <a:pt x="71622" y="215959"/>
-                  </a:lnTo>
-                  <a:lnTo>
-                    <a:pt x="0" y="220349"/>
+                    <a:pt x="3008146" y="5763"/>
+                  </a:lnTo>
+                  <a:lnTo>
+                    <a:pt x="2936523" y="11486"/>
+                  </a:lnTo>
+                  <a:lnTo>
+                    <a:pt x="2864901" y="17170"/>
+                  </a:lnTo>
+                  <a:lnTo>
+                    <a:pt x="2793278" y="22814"/>
+                  </a:lnTo>
+                  <a:lnTo>
+                    <a:pt x="2721655" y="28419"/>
+                  </a:lnTo>
+                  <a:lnTo>
+                    <a:pt x="2650033" y="33984"/>
+                  </a:lnTo>
+                  <a:lnTo>
+                    <a:pt x="2578410" y="39511"/>
+                  </a:lnTo>
+                  <a:lnTo>
+                    <a:pt x="2506788" y="44999"/>
+                  </a:lnTo>
+                  <a:lnTo>
+                    <a:pt x="2435165" y="50449"/>
+                  </a:lnTo>
+                  <a:lnTo>
+                    <a:pt x="2363543" y="55861"/>
+                  </a:lnTo>
+                  <a:lnTo>
+                    <a:pt x="2291920" y="61236"/>
+                  </a:lnTo>
+                  <a:lnTo>
+                    <a:pt x="2220298" y="66573"/>
+                  </a:lnTo>
+                  <a:lnTo>
+                    <a:pt x="2148675" y="71872"/>
+                  </a:lnTo>
+                  <a:lnTo>
+                    <a:pt x="2077053" y="77135"/>
+                  </a:lnTo>
+                  <a:lnTo>
+                    <a:pt x="2005430" y="82361"/>
+                  </a:lnTo>
+                  <a:lnTo>
+                    <a:pt x="1933808" y="87551"/>
+                  </a:lnTo>
+                  <a:lnTo>
+                    <a:pt x="1862185" y="92705"/>
+                  </a:lnTo>
+                  <a:lnTo>
+                    <a:pt x="1790563" y="97822"/>
+                  </a:lnTo>
+                  <a:lnTo>
+                    <a:pt x="1718940" y="102904"/>
+                  </a:lnTo>
+                  <a:lnTo>
+                    <a:pt x="1647318" y="107951"/>
+                  </a:lnTo>
+                  <a:lnTo>
+                    <a:pt x="1575695" y="112963"/>
+                  </a:lnTo>
+                  <a:lnTo>
+                    <a:pt x="1504073" y="117939"/>
+                  </a:lnTo>
+                  <a:lnTo>
+                    <a:pt x="1432450" y="122881"/>
+                  </a:lnTo>
+                  <a:lnTo>
+                    <a:pt x="1360827" y="127789"/>
+                  </a:lnTo>
+                  <a:lnTo>
+                    <a:pt x="1289205" y="132662"/>
+                  </a:lnTo>
+                  <a:lnTo>
+                    <a:pt x="1217582" y="137501"/>
+                  </a:lnTo>
+                  <a:lnTo>
+                    <a:pt x="1145960" y="142307"/>
+                  </a:lnTo>
+                  <a:lnTo>
+                    <a:pt x="1074337" y="147079"/>
+                  </a:lnTo>
+                  <a:lnTo>
+                    <a:pt x="1002715" y="151818"/>
+                  </a:lnTo>
+                  <a:lnTo>
+                    <a:pt x="931092" y="156524"/>
+                  </a:lnTo>
+                  <a:lnTo>
+                    <a:pt x="859470" y="161197"/>
+                  </a:lnTo>
+                  <a:lnTo>
+                    <a:pt x="787847" y="165837"/>
+                  </a:lnTo>
+                  <a:lnTo>
+                    <a:pt x="716225" y="170445"/>
+                  </a:lnTo>
+                  <a:lnTo>
+                    <a:pt x="644602" y="175022"/>
+                  </a:lnTo>
+                  <a:lnTo>
+                    <a:pt x="572980" y="179566"/>
+                  </a:lnTo>
+                  <a:lnTo>
+                    <a:pt x="501357" y="184078"/>
+                  </a:lnTo>
+                  <a:lnTo>
+                    <a:pt x="429735" y="188559"/>
+                  </a:lnTo>
+                  <a:lnTo>
+                    <a:pt x="358112" y="193009"/>
+                  </a:lnTo>
+                  <a:lnTo>
+                    <a:pt x="286490" y="197428"/>
+                  </a:lnTo>
+                  <a:lnTo>
+                    <a:pt x="214867" y="201816"/>
+                  </a:lnTo>
+                  <a:lnTo>
+                    <a:pt x="143245" y="206174"/>
+                  </a:lnTo>
+                  <a:lnTo>
+                    <a:pt x="71622" y="210501"/>
+                  </a:lnTo>
+                  <a:lnTo>
+                    <a:pt x="0" y="214798"/>
                   </a:lnTo>
                 </a:path>
               </a:pathLst>
@@ -4481,252 +4481,252 @@
           </p:nvSpPr>
           <p:spPr>
             <a:xfrm>
-              <a:off x="2642165" y="2073503"/>
-              <a:ext cx="5620513" cy="3460315"/>
+              <a:off x="2665102" y="2073503"/>
+              <a:ext cx="5597577" cy="3459741"/>
             </a:xfrm>
             <a:custGeom>
               <a:avLst/>
               <a:pathLst>
-                <a:path w="5620513" h="3460315">
+                <a:path w="5597577" h="3459741">
                   <a:moveTo>
                     <a:pt x="0" y="0"/>
                   </a:moveTo>
                   <a:lnTo>
-                    <a:pt x="33956" y="105401"/>
-                  </a:lnTo>
-                  <a:lnTo>
-                    <a:pt x="105579" y="313990"/>
-                  </a:lnTo>
-                  <a:lnTo>
-                    <a:pt x="177201" y="509700"/>
-                  </a:lnTo>
-                  <a:lnTo>
-                    <a:pt x="248824" y="693327"/>
-                  </a:lnTo>
-                  <a:lnTo>
-                    <a:pt x="320446" y="865615"/>
-                  </a:lnTo>
-                  <a:lnTo>
-                    <a:pt x="392069" y="1027266"/>
-                  </a:lnTo>
-                  <a:lnTo>
-                    <a:pt x="463691" y="1178937"/>
-                  </a:lnTo>
-                  <a:lnTo>
-                    <a:pt x="535314" y="1321243"/>
-                  </a:lnTo>
-                  <a:lnTo>
-                    <a:pt x="606936" y="1454762"/>
-                  </a:lnTo>
-                  <a:lnTo>
-                    <a:pt x="678559" y="1580037"/>
-                  </a:lnTo>
-                  <a:lnTo>
-                    <a:pt x="750182" y="1697578"/>
-                  </a:lnTo>
-                  <a:lnTo>
-                    <a:pt x="821804" y="1807861"/>
-                  </a:lnTo>
-                  <a:lnTo>
-                    <a:pt x="893427" y="1911336"/>
-                  </a:lnTo>
-                  <a:lnTo>
-                    <a:pt x="965049" y="2008421"/>
-                  </a:lnTo>
-                  <a:lnTo>
-                    <a:pt x="1036672" y="2099512"/>
-                  </a:lnTo>
-                  <a:lnTo>
-                    <a:pt x="1108294" y="2184979"/>
-                  </a:lnTo>
-                  <a:lnTo>
-                    <a:pt x="1179917" y="2265168"/>
-                  </a:lnTo>
-                  <a:lnTo>
-                    <a:pt x="1251539" y="2340407"/>
-                  </a:lnTo>
-                  <a:lnTo>
-                    <a:pt x="1323162" y="2411000"/>
-                  </a:lnTo>
-                  <a:lnTo>
-                    <a:pt x="1394784" y="2477235"/>
-                  </a:lnTo>
-                  <a:lnTo>
-                    <a:pt x="1466407" y="2539380"/>
-                  </a:lnTo>
-                  <a:lnTo>
-                    <a:pt x="1538029" y="2597688"/>
-                  </a:lnTo>
-                  <a:lnTo>
-                    <a:pt x="1609652" y="2652396"/>
-                  </a:lnTo>
-                  <a:lnTo>
-                    <a:pt x="1681274" y="2703726"/>
-                  </a:lnTo>
-                  <a:lnTo>
-                    <a:pt x="1752897" y="2751886"/>
-                  </a:lnTo>
-                  <a:lnTo>
-                    <a:pt x="1824519" y="2797074"/>
-                  </a:lnTo>
-                  <a:lnTo>
-                    <a:pt x="1896142" y="2839471"/>
-                  </a:lnTo>
-                  <a:lnTo>
-                    <a:pt x="1967764" y="2879250"/>
-                  </a:lnTo>
-                  <a:lnTo>
-                    <a:pt x="2039387" y="2916574"/>
-                  </a:lnTo>
-                  <a:lnTo>
-                    <a:pt x="2111010" y="2951593"/>
-                  </a:lnTo>
-                  <a:lnTo>
-                    <a:pt x="2182632" y="2984449"/>
-                  </a:lnTo>
-                  <a:lnTo>
-                    <a:pt x="2254255" y="3015277"/>
-                  </a:lnTo>
-                  <a:lnTo>
-                    <a:pt x="2325877" y="3044202"/>
-                  </a:lnTo>
-                  <a:lnTo>
-                    <a:pt x="2397500" y="3071341"/>
-                  </a:lnTo>
-                  <a:lnTo>
-                    <a:pt x="2469122" y="3096804"/>
-                  </a:lnTo>
-                  <a:lnTo>
-                    <a:pt x="2540745" y="3120695"/>
-                  </a:lnTo>
-                  <a:lnTo>
-                    <a:pt x="2612367" y="3143111"/>
-                  </a:lnTo>
-                  <a:lnTo>
-                    <a:pt x="2683990" y="3164143"/>
-                  </a:lnTo>
-                  <a:lnTo>
-                    <a:pt x="2755612" y="3183876"/>
-                  </a:lnTo>
-                  <a:lnTo>
-                    <a:pt x="2827235" y="3202391"/>
-                  </a:lnTo>
-                  <a:lnTo>
-                    <a:pt x="2898857" y="3219763"/>
-                  </a:lnTo>
-                  <a:lnTo>
-                    <a:pt x="2970480" y="3236062"/>
-                  </a:lnTo>
-                  <a:lnTo>
-                    <a:pt x="3042102" y="3251354"/>
-                  </a:lnTo>
-                  <a:lnTo>
-                    <a:pt x="3113725" y="3265703"/>
-                  </a:lnTo>
-                  <a:lnTo>
-                    <a:pt x="3185347" y="3279166"/>
-                  </a:lnTo>
-                  <a:lnTo>
-                    <a:pt x="3256970" y="3291797"/>
-                  </a:lnTo>
-                  <a:lnTo>
-                    <a:pt x="3328592" y="3303649"/>
-                  </a:lnTo>
-                  <a:lnTo>
-                    <a:pt x="3400215" y="3314768"/>
-                  </a:lnTo>
-                  <a:lnTo>
-                    <a:pt x="3471838" y="3325202"/>
-                  </a:lnTo>
-                  <a:lnTo>
-                    <a:pt x="3543460" y="3334991"/>
-                  </a:lnTo>
-                  <a:lnTo>
-                    <a:pt x="3615083" y="3344175"/>
-                  </a:lnTo>
-                  <a:lnTo>
-                    <a:pt x="3686705" y="3352793"/>
-                  </a:lnTo>
-                  <a:lnTo>
-                    <a:pt x="3758328" y="3360878"/>
-                  </a:lnTo>
-                  <a:lnTo>
-                    <a:pt x="3829950" y="3368464"/>
-                  </a:lnTo>
-                  <a:lnTo>
-                    <a:pt x="3901573" y="3375582"/>
-                  </a:lnTo>
-                  <a:lnTo>
-                    <a:pt x="3973195" y="3382261"/>
-                  </a:lnTo>
-                  <a:lnTo>
-                    <a:pt x="4044818" y="3388527"/>
-                  </a:lnTo>
-                  <a:lnTo>
-                    <a:pt x="4116440" y="3394406"/>
-                  </a:lnTo>
-                  <a:lnTo>
-                    <a:pt x="4188063" y="3399922"/>
-                  </a:lnTo>
-                  <a:lnTo>
-                    <a:pt x="4259685" y="3405098"/>
-                  </a:lnTo>
-                  <a:lnTo>
-                    <a:pt x="4331308" y="3409954"/>
-                  </a:lnTo>
-                  <a:lnTo>
-                    <a:pt x="4402930" y="3414510"/>
-                  </a:lnTo>
-                  <a:lnTo>
-                    <a:pt x="4474553" y="3418785"/>
-                  </a:lnTo>
-                  <a:lnTo>
-                    <a:pt x="4546175" y="3422796"/>
-                  </a:lnTo>
-                  <a:lnTo>
-                    <a:pt x="4617798" y="3426559"/>
-                  </a:lnTo>
-                  <a:lnTo>
-                    <a:pt x="4689420" y="3430090"/>
-                  </a:lnTo>
-                  <a:lnTo>
-                    <a:pt x="4761043" y="3433403"/>
-                  </a:lnTo>
-                  <a:lnTo>
-                    <a:pt x="4832666" y="3436511"/>
-                  </a:lnTo>
-                  <a:lnTo>
-                    <a:pt x="4904288" y="3439428"/>
-                  </a:lnTo>
-                  <a:lnTo>
-                    <a:pt x="4975911" y="3442164"/>
-                  </a:lnTo>
-                  <a:lnTo>
-                    <a:pt x="5047533" y="3444731"/>
-                  </a:lnTo>
-                  <a:lnTo>
-                    <a:pt x="5119156" y="3447140"/>
-                  </a:lnTo>
-                  <a:lnTo>
-                    <a:pt x="5190778" y="3449400"/>
-                  </a:lnTo>
-                  <a:lnTo>
-                    <a:pt x="5262401" y="3451521"/>
-                  </a:lnTo>
-                  <a:lnTo>
-                    <a:pt x="5334023" y="3453511"/>
-                  </a:lnTo>
-                  <a:lnTo>
-                    <a:pt x="5405646" y="3455378"/>
-                  </a:lnTo>
-                  <a:lnTo>
-                    <a:pt x="5477268" y="3457129"/>
-                  </a:lnTo>
-                  <a:lnTo>
-                    <a:pt x="5548891" y="3458773"/>
-                  </a:lnTo>
-                  <a:lnTo>
-                    <a:pt x="5620513" y="3460315"/>
+                    <a:pt x="11020" y="34894"/>
+                  </a:lnTo>
+                  <a:lnTo>
+                    <a:pt x="82642" y="247690"/>
+                  </a:lnTo>
+                  <a:lnTo>
+                    <a:pt x="154265" y="447357"/>
+                  </a:lnTo>
+                  <a:lnTo>
+                    <a:pt x="225887" y="634703"/>
+                  </a:lnTo>
+                  <a:lnTo>
+                    <a:pt x="297510" y="810491"/>
+                  </a:lnTo>
+                  <a:lnTo>
+                    <a:pt x="369132" y="975432"/>
+                  </a:lnTo>
+                  <a:lnTo>
+                    <a:pt x="440755" y="1130196"/>
+                  </a:lnTo>
+                  <a:lnTo>
+                    <a:pt x="512377" y="1275412"/>
+                  </a:lnTo>
+                  <a:lnTo>
+                    <a:pt x="584000" y="1411667"/>
+                  </a:lnTo>
+                  <a:lnTo>
+                    <a:pt x="655622" y="1539515"/>
+                  </a:lnTo>
+                  <a:lnTo>
+                    <a:pt x="727245" y="1659475"/>
+                  </a:lnTo>
+                  <a:lnTo>
+                    <a:pt x="798867" y="1772034"/>
+                  </a:lnTo>
+                  <a:lnTo>
+                    <a:pt x="870490" y="1877647"/>
+                  </a:lnTo>
+                  <a:lnTo>
+                    <a:pt x="942113" y="1976744"/>
+                  </a:lnTo>
+                  <a:lnTo>
+                    <a:pt x="1013735" y="2069727"/>
+                  </a:lnTo>
+                  <a:lnTo>
+                    <a:pt x="1085358" y="2156973"/>
+                  </a:lnTo>
+                  <a:lnTo>
+                    <a:pt x="1156980" y="2238836"/>
+                  </a:lnTo>
+                  <a:lnTo>
+                    <a:pt x="1228603" y="2315647"/>
+                  </a:lnTo>
+                  <a:lnTo>
+                    <a:pt x="1300225" y="2387720"/>
+                  </a:lnTo>
+                  <a:lnTo>
+                    <a:pt x="1371848" y="2455345"/>
+                  </a:lnTo>
+                  <a:lnTo>
+                    <a:pt x="1443470" y="2518798"/>
+                  </a:lnTo>
+                  <a:lnTo>
+                    <a:pt x="1515093" y="2578336"/>
+                  </a:lnTo>
+                  <a:lnTo>
+                    <a:pt x="1586715" y="2634200"/>
+                  </a:lnTo>
+                  <a:lnTo>
+                    <a:pt x="1658338" y="2686617"/>
+                  </a:lnTo>
+                  <a:lnTo>
+                    <a:pt x="1729960" y="2735801"/>
+                  </a:lnTo>
+                  <a:lnTo>
+                    <a:pt x="1801583" y="2781949"/>
+                  </a:lnTo>
+                  <a:lnTo>
+                    <a:pt x="1873205" y="2825251"/>
+                  </a:lnTo>
+                  <a:lnTo>
+                    <a:pt x="1944828" y="2865880"/>
+                  </a:lnTo>
+                  <a:lnTo>
+                    <a:pt x="2016450" y="2904003"/>
+                  </a:lnTo>
+                  <a:lnTo>
+                    <a:pt x="2088073" y="2939773"/>
+                  </a:lnTo>
+                  <a:lnTo>
+                    <a:pt x="2159695" y="2973337"/>
+                  </a:lnTo>
+                  <a:lnTo>
+                    <a:pt x="2231318" y="3004829"/>
+                  </a:lnTo>
+                  <a:lnTo>
+                    <a:pt x="2302940" y="3034379"/>
+                  </a:lnTo>
+                  <a:lnTo>
+                    <a:pt x="2374563" y="3062105"/>
+                  </a:lnTo>
+                  <a:lnTo>
+                    <a:pt x="2446186" y="3088120"/>
+                  </a:lnTo>
+                  <a:lnTo>
+                    <a:pt x="2517808" y="3112531"/>
+                  </a:lnTo>
+                  <a:lnTo>
+                    <a:pt x="2589431" y="3135435"/>
+                  </a:lnTo>
+                  <a:lnTo>
+                    <a:pt x="2661053" y="3156926"/>
+                  </a:lnTo>
+                  <a:lnTo>
+                    <a:pt x="2732676" y="3177091"/>
+                  </a:lnTo>
+                  <a:lnTo>
+                    <a:pt x="2804298" y="3196012"/>
+                  </a:lnTo>
+                  <a:lnTo>
+                    <a:pt x="2875921" y="3213765"/>
+                  </a:lnTo>
+                  <a:lnTo>
+                    <a:pt x="2947543" y="3230423"/>
+                  </a:lnTo>
+                  <a:lnTo>
+                    <a:pt x="3019166" y="3246053"/>
+                  </a:lnTo>
+                  <a:lnTo>
+                    <a:pt x="3090788" y="3260719"/>
+                  </a:lnTo>
+                  <a:lnTo>
+                    <a:pt x="3162411" y="3274480"/>
+                  </a:lnTo>
+                  <a:lnTo>
+                    <a:pt x="3234033" y="3287392"/>
+                  </a:lnTo>
+                  <a:lnTo>
+                    <a:pt x="3305656" y="3299507"/>
+                  </a:lnTo>
+                  <a:lnTo>
+                    <a:pt x="3377278" y="3310875"/>
+                  </a:lnTo>
+                  <a:lnTo>
+                    <a:pt x="3448901" y="3321541"/>
+                  </a:lnTo>
+                  <a:lnTo>
+                    <a:pt x="3520523" y="3331549"/>
+                  </a:lnTo>
+                  <a:lnTo>
+                    <a:pt x="3592146" y="3340940"/>
+                  </a:lnTo>
+                  <a:lnTo>
+                    <a:pt x="3663768" y="3349751"/>
+                  </a:lnTo>
+                  <a:lnTo>
+                    <a:pt x="3735391" y="3358019"/>
+                  </a:lnTo>
+                  <a:lnTo>
+                    <a:pt x="3807014" y="3365776"/>
+                  </a:lnTo>
+                  <a:lnTo>
+                    <a:pt x="3878636" y="3373055"/>
+                  </a:lnTo>
+                  <a:lnTo>
+                    <a:pt x="3950259" y="3379885"/>
+                  </a:lnTo>
+                  <a:lnTo>
+                    <a:pt x="4021881" y="3386293"/>
+                  </a:lnTo>
+                  <a:lnTo>
+                    <a:pt x="4093504" y="3392306"/>
+                  </a:lnTo>
+                  <a:lnTo>
+                    <a:pt x="4165126" y="3397948"/>
+                  </a:lnTo>
+                  <a:lnTo>
+                    <a:pt x="4236749" y="3403242"/>
+                  </a:lnTo>
+                  <a:lnTo>
+                    <a:pt x="4308371" y="3408209"/>
+                  </a:lnTo>
+                  <a:lnTo>
+                    <a:pt x="4379994" y="3412869"/>
+                  </a:lnTo>
+                  <a:lnTo>
+                    <a:pt x="4451616" y="3417243"/>
+                  </a:lnTo>
+                  <a:lnTo>
+                    <a:pt x="4523239" y="3421346"/>
+                  </a:lnTo>
+                  <a:lnTo>
+                    <a:pt x="4594861" y="3425196"/>
+                  </a:lnTo>
+                  <a:lnTo>
+                    <a:pt x="4666484" y="3428809"/>
+                  </a:lnTo>
+                  <a:lnTo>
+                    <a:pt x="4738106" y="3432198"/>
+                  </a:lnTo>
+                  <a:lnTo>
+                    <a:pt x="4809729" y="3435379"/>
+                  </a:lnTo>
+                  <a:lnTo>
+                    <a:pt x="4881351" y="3438363"/>
+                  </a:lnTo>
+                  <a:lnTo>
+                    <a:pt x="4952974" y="3441163"/>
+                  </a:lnTo>
+                  <a:lnTo>
+                    <a:pt x="5024596" y="3443791"/>
+                  </a:lnTo>
+                  <a:lnTo>
+                    <a:pt x="5096219" y="3446256"/>
+                  </a:lnTo>
+                  <a:lnTo>
+                    <a:pt x="5167842" y="3448569"/>
+                  </a:lnTo>
+                  <a:lnTo>
+                    <a:pt x="5239464" y="3450740"/>
+                  </a:lnTo>
+                  <a:lnTo>
+                    <a:pt x="5311087" y="3452776"/>
+                  </a:lnTo>
+                  <a:lnTo>
+                    <a:pt x="5382709" y="3454687"/>
+                  </a:lnTo>
+                  <a:lnTo>
+                    <a:pt x="5454332" y="3456480"/>
+                  </a:lnTo>
+                  <a:lnTo>
+                    <a:pt x="5525954" y="3458162"/>
+                  </a:lnTo>
+                  <a:lnTo>
+                    <a:pt x="5597577" y="3459741"/>
                   </a:lnTo>
                 </a:path>
               </a:pathLst>
@@ -4798,7 +4798,7 @@
           </p:nvSpPr>
           <p:spPr>
             <a:xfrm>
-              <a:off x="4254372" y="2073503"/>
+              <a:off x="4278722" y="2073503"/>
               <a:ext cx="0" cy="3649639"/>
             </a:xfrm>
             <a:custGeom>
@@ -5071,7 +5071,7 @@
           </p:nvSpPr>
           <p:spPr>
             <a:xfrm>
-              <a:off x="1347083" y="5785772"/>
+              <a:off x="1347751" y="5785772"/>
               <a:ext cx="161574" cy="80101"/>
             </a:xfrm>
             <a:prstGeom prst="rect">
@@ -5117,7 +5117,7 @@
           </p:nvSpPr>
           <p:spPr>
             <a:xfrm>
-              <a:off x="2254916" y="5785772"/>
+              <a:off x="2255364" y="5785772"/>
               <a:ext cx="161574" cy="80101"/>
             </a:xfrm>
             <a:prstGeom prst="rect">
@@ -5163,7 +5163,7 @@
           </p:nvSpPr>
           <p:spPr>
             <a:xfrm>
-              <a:off x="3162750" y="5785772"/>
+              <a:off x="3162976" y="5785772"/>
               <a:ext cx="161574" cy="80101"/>
             </a:xfrm>
             <a:prstGeom prst="rect">
@@ -5209,7 +5209,7 @@
           </p:nvSpPr>
           <p:spPr>
             <a:xfrm>
-              <a:off x="4120281" y="5785772"/>
+              <a:off x="4120286" y="5785772"/>
               <a:ext cx="62179" cy="80101"/>
             </a:xfrm>
             <a:prstGeom prst="rect">
@@ -5255,7 +5255,7 @@
           </p:nvSpPr>
           <p:spPr>
             <a:xfrm>
-              <a:off x="4997024" y="5785772"/>
+              <a:off x="4996809" y="5785772"/>
               <a:ext cx="124358" cy="80101"/>
             </a:xfrm>
             <a:prstGeom prst="rect">
@@ -5301,7 +5301,7 @@
           </p:nvSpPr>
           <p:spPr>
             <a:xfrm>
-              <a:off x="5904858" y="5785772"/>
+              <a:off x="5904422" y="5785772"/>
               <a:ext cx="124358" cy="80101"/>
             </a:xfrm>
             <a:prstGeom prst="rect">
@@ -5347,7 +5347,7 @@
           </p:nvSpPr>
           <p:spPr>
             <a:xfrm>
-              <a:off x="6812691" y="5785772"/>
+              <a:off x="6812034" y="5785772"/>
               <a:ext cx="124358" cy="80101"/>
             </a:xfrm>
             <a:prstGeom prst="rect">
@@ -5393,7 +5393,7 @@
           </p:nvSpPr>
           <p:spPr>
             <a:xfrm>
-              <a:off x="7720525" y="5785772"/>
+              <a:off x="7719647" y="5785772"/>
               <a:ext cx="124358" cy="80101"/>
             </a:xfrm>
             <a:prstGeom prst="rect">
@@ -5564,7 +5564,7 @@
                   <a:latin typeface="Helvetica"/>
                   <a:cs typeface="Helvetica"/>
                 </a:rPr>
-                <a:t>subHR per 10 % decline: 2.24 (0.91-5.51), p = 0.078  |  per IQR decline (Δ = 26.4 %): 8.47 (0.79-91.28)  |  IQR: [-11.1, 15.3] %</a:t>
+                <a:t>subHR per 10 % decline: 2.24 (0.92-5.49), p = 0.077  |  per IQR decline (Δ = 26.4 %): 8.43 (0.79-89.75)  |  IQR: [-11.1, 15.4] %</a:t>
               </a:r>
             </a:p>
           </p:txBody>
